--- a/modulo-05/05.05 - Considerações Especiais para SAP S_4HANA Cloud Private Edition e On-Premise/05.05_Dominando_os_Dois_Mundos_Estratégia_Clean_Core.pptx
+++ b/modulo-05/05.05 - Considerações Especiais para SAP S_4HANA Cloud Private Edition e On-Premise/05.05_Dominando_os_Dois_Mundos_Estratégia_Clean_Core.pptx
@@ -19,9 +19,10 @@
     <p:sldId id="267" r:id="rId13"/>
     <p:sldId id="268" r:id="rId14"/>
     <p:sldId id="269" r:id="rId15"/>
+    <p:sldId id="270" r:id="rId16"/>
   </p:sldIdLst>
   <p:notesMasterIdLst>
-    <p:notesMasterId r:id="rId16"/>
+    <p:notesMasterId r:id="rId17"/>
   </p:notesMasterIdLst>
   <p:sldSz cx="12192000" cy="6858000"/>
   <p:notesSz cx="6858000" cy="12192000"/>
@@ -979,6 +980,94 @@
             <a:fld id="{F7021451-1387-4CA6-816F-3879F97B5CBC}" type="slidenum">
               <a:rPr lang="en-US"/>
               <a:t>14</a:t>
+            </a:fld>
+            <a:endParaRPr lang="en-US"/>
+          </a:p>
+        </p:txBody>
+      </p:sp>
+    </p:spTree>
+    <p:extLst>
+      <p:ext uri="{BB962C8B-B14F-4D97-AF65-F5344CB8AC3E}">
+        <p14:creationId xmlns:p14="http://schemas.microsoft.com/office/powerpoint/2010/main" val="1024086991"/>
+      </p:ext>
+    </p:extLst>
+  </p:cSld>
+  <p:clrMapOvr>
+    <a:masterClrMapping/>
+  </p:clrMapOvr>
+</p:notes>
+</file>
+
+<file path=ppt/notesSlides/notesSlide15.xml><?xml version="1.0" encoding="utf-8"?>
+<p:notes xmlns:a="http://schemas.openxmlformats.org/drawingml/2006/main" xmlns:r="http://schemas.openxmlformats.org/officeDocument/2006/relationships" xmlns:p="http://schemas.openxmlformats.org/presentationml/2006/main">
+  <p:cSld>
+    <p:spTree>
+      <p:nvGrpSpPr>
+        <p:cNvPr id="1" name=""/>
+        <p:cNvGrpSpPr/>
+        <p:nvPr/>
+      </p:nvGrpSpPr>
+      <p:grpSpPr>
+        <a:xfrm>
+          <a:off x="0" y="0"/>
+          <a:ext cx="0" cy="0"/>
+          <a:chOff x="0" y="0"/>
+          <a:chExt cx="0" cy="0"/>
+        </a:xfrm>
+      </p:grpSpPr>
+      <p:sp>
+        <p:nvSpPr>
+          <p:cNvPr id="2" name="Slide Image Placeholder 1"/>
+          <p:cNvSpPr>
+            <a:spLocks noGrp="1" noRot="1" noChangeAspect="1"/>
+          </p:cNvSpPr>
+          <p:nvPr>
+            <p:ph type="sldImg"/>
+          </p:nvPr>
+        </p:nvSpPr>
+        <p:spPr/>
+      </p:sp>
+      <p:sp>
+        <p:nvSpPr>
+          <p:cNvPr id="3" name="Notes Placeholder 2"/>
+          <p:cNvSpPr>
+            <a:spLocks noGrp="1"/>
+          </p:cNvSpPr>
+          <p:nvPr>
+            <p:ph type="body" idx="1"/>
+          </p:nvPr>
+        </p:nvSpPr>
+        <p:spPr/>
+        <p:txBody>
+          <a:bodyPr/>
+          <a:lstStyle/>
+          <a:p>
+            <a:r>
+              <a:rPr lang="en-US" dirty="0"/>
+              <a:t/>
+            </a:r>
+            <a:endParaRPr lang="en-US" dirty="0"/>
+          </a:p>
+        </p:txBody>
+      </p:sp>
+      <p:sp>
+        <p:nvSpPr>
+          <p:cNvPr id="4" name="Slide Number Placeholder 3"/>
+          <p:cNvSpPr>
+            <a:spLocks noGrp="1"/>
+          </p:cNvSpPr>
+          <p:nvPr>
+            <p:ph type="sldNum" sz="quarter" idx="10"/>
+          </p:nvPr>
+        </p:nvSpPr>
+        <p:spPr/>
+        <p:txBody>
+          <a:bodyPr/>
+          <a:lstStyle/>
+          <a:p>
+            <a:fld id="{F7021451-1387-4CA6-816F-3879F97B5CBC}" type="slidenum">
+              <a:rPr lang="en-US"/>
+              <a:t>15</a:t>
             </a:fld>
             <a:endParaRPr lang="en-US"/>
           </a:p>
@@ -2913,7 +3002,7 @@
                   <a:srgbClr val="FFFFFF"/>
                 </a:solidFill>
               </a:rPr>
-              <a:t>Tier 2 · Mundo Cloud</a:t>
+              <a:t>Tier 1 · Mundo Cloud</a:t>
             </a:r>
             <a:endParaRPr lang="en-US" sz="1300" dirty="0"/>
           </a:p>
@@ -3656,7 +3745,7 @@
                 <a:ea typeface="Courier New" pitchFamily="34" charset="-122"/>
                 <a:cs typeface="Courier New" pitchFamily="34" charset="-120"/>
               </a:rPr>
-              <a:t>SAP_CP_READINESS_REMOTE</a:t>
+              <a:t>ABAP_CLOUD_READINESS</a:t>
             </a:r>
             <a:endParaRPr lang="en-US" sz="1700" dirty="0"/>
           </a:p>
@@ -3692,7 +3781,7 @@
                   <a:srgbClr val="1D2D3E"/>
                 </a:solidFill>
               </a:rPr>
-              <a:t>Verifica a conformidade com as regras do Mundo Cloud.</a:t>
+              <a:t>Verifica a conformidade com as regras do ABAP Cloud.</a:t>
             </a:r>
             <a:endParaRPr lang="en-US" sz="1500" dirty="0"/>
           </a:p>
@@ -3750,7 +3839,44 @@
                   <a:srgbClr val="556B82"/>
                 </a:solidFill>
               </a:rPr>
-              <a:t>Uso de sintaxe ABAP obsoleta.</a:t>
+              <a:t>Uso de sintaxe e objetos não permitidos no ABAP Cloud.</a:t>
+            </a:r>
+            <a:endParaRPr lang="en-US" sz="1600" dirty="0"/>
+          </a:p>
+          <a:p>
+            <a:pPr marL="203200" indent="-203200">
+              <a:spcAft>
+                <a:spcPts val="600"/>
+              </a:spcAft>
+              <a:buSzPct val="100000"/>
+              <a:buChar char="•"/>
+            </a:pPr>
+            <a:r>
+              <a:rPr lang="en-US" sz="1400" dirty="0">
+                <a:solidFill>
+                  <a:srgbClr val="556B82"/>
+                </a:solidFill>
+              </a:rPr>
+              <a:t>Para código novo, use a variante </a:t>
+            </a:r>
+            <a:r>
+              <a:rPr lang="en-US" sz="1400" dirty="0">
+                <a:solidFill>
+                  <a:srgbClr val="0064D9"/>
+                </a:solidFill>
+                <a:latin typeface="Courier New" pitchFamily="34" charset="0"/>
+                <a:ea typeface="Courier New" pitchFamily="34" charset="-122"/>
+                <a:cs typeface="Courier New" pitchFamily="34" charset="-120"/>
+              </a:rPr>
+              <a:t>ABAP_CLOUD_DEVELOPMENT_DEFAULT</a:t>
+            </a:r>
+            <a:r>
+              <a:rPr lang="en-US" sz="1400" dirty="0">
+                <a:solidFill>
+                  <a:srgbClr val="556B82"/>
+                </a:solidFill>
+              </a:rPr>
+              <a:t>.</a:t>
             </a:r>
             <a:endParaRPr lang="en-US" sz="1600" dirty="0"/>
           </a:p>
@@ -4297,7 +4423,7 @@
                   <a:srgbClr val="1D2D3E"/>
                 </a:solidFill>
               </a:rPr>
-              <a:t>App Fiori / Serviço RAP · Mundo Cloud (Tier 2)</a:t>
+              <a:t>App Fiori / Serviço RAP · Mundo Cloud (Tier 1)</a:t>
             </a:r>
             <a:endParaRPr lang="en-US" sz="1500" dirty="0"/>
           </a:p>
@@ -4434,7 +4560,7 @@
                   <a:srgbClr val="1D2D3E"/>
                 </a:solidFill>
               </a:rPr>
-              <a:t>Classe Wrapper · A Ponte Estratégica (Tier 3)</a:t>
+              <a:t>Classe Wrapper · A Ponte Estratégica (Tier 2 · Cloud API Enablement)</a:t>
             </a:r>
             <a:endParaRPr lang="en-US" sz="1500" dirty="0"/>
           </a:p>
@@ -4651,7 +4777,7 @@
                   <a:srgbClr val="1D2D3E"/>
                 </a:solidFill>
               </a:rPr>
-              <a:t>Mundo Cloud (Tier 2)</a:t>
+              <a:t>Mundo Cloud (Tier 1)</a:t>
             </a:r>
             <a:r>
               <a:rPr lang="en-US" sz="1500" dirty="0">
@@ -4909,7 +5035,7 @@
                   <a:srgbClr val="0070F2"/>
                 </a:solidFill>
               </a:rPr>
-              <a:t>Seu Plano de Ação</a:t>
+              <a:t>Atualização 2025 da SAP</a:t>
             </a:r>
             <a:endParaRPr lang="en-US" sz="1300" dirty="0"/>
           </a:p>
@@ -4947,7 +5073,7 @@
                   <a:srgbClr val="1D2D3E"/>
                 </a:solidFill>
               </a:rPr>
-              <a:t>A Estratégia de 3 Passos para o Clean Core</a:t>
+              <a:t>Dos 3 Tiers aos Níveis A–D do Clean Core</a:t>
             </a:r>
             <a:endParaRPr lang="en-US" sz="3000" dirty="0"/>
           </a:p>
@@ -4955,18 +5081,70 @@
       </p:sp>
       <p:sp>
         <p:nvSpPr>
-          <p:cNvPr id="4" name="Shape 2"/>
-          <p:cNvSpPr/>
-          <p:nvPr/>
-        </p:nvSpPr>
-        <p:spPr>
-          <a:xfrm>
-            <a:off x="548640" y="1691640"/>
-            <a:ext cx="3515258" cy="4343400"/>
+          <p:cNvPr id="4" name="Text 2"/>
+          <p:cNvSpPr txBox="1"/>
+          <p:nvPr/>
+        </p:nvSpPr>
+        <p:spPr>
+          <a:xfrm>
+            <a:off x="548640" y="1554480"/>
+            <a:ext cx="11094415" cy="685800"/>
+          </a:xfrm>
+          <a:prstGeom prst="rect">
+            <a:avLst/>
+          </a:prstGeom>
+          <a:noFill/>
+          <a:ln/>
+        </p:spPr>
+        <p:txBody>
+          <a:bodyPr wrap="square" lIns="0" tIns="0" rIns="0" bIns="0" rtlCol="0" anchor="t"/>
+          <a:lstStyle/>
+          <a:p>
+            <a:pPr indent="0" marL="0">
+              <a:buNone/>
+            </a:pPr>
+            <a:r>
+              <a:rPr lang="en-US" sz="1500" dirty="0">
+                <a:solidFill>
+                  <a:srgbClr val="1D2D3E"/>
+                </a:solidFill>
+              </a:rPr>
+              <a:t>A SAP evoluiu o modelo de 3 Tiers para o </a:t>
+            </a:r>
+            <a:r>
+              <a:rPr lang="en-US" sz="1500" b="1" dirty="0">
+                <a:solidFill>
+                  <a:srgbClr val="1D2D3E"/>
+                </a:solidFill>
+              </a:rPr>
+              <a:t>conceito de níveis de Clean Core</a:t>
+            </a:r>
+            <a:r>
+              <a:rPr lang="en-US" sz="1500" dirty="0">
+                <a:solidFill>
+                  <a:srgbClr val="1D2D3E"/>
+                </a:solidFill>
+              </a:rPr>
+              <a:t>. A classificação deixa de tratar todo ABAP clássico como “sujo” e passa a avaliar o risco de upgrade de cada objeto usado.</a:t>
+            </a:r>
+            <a:endParaRPr lang="en-US" sz="1600" dirty="0"/>
+          </a:p>
+        </p:txBody>
+      </p:sp>
+      <p:sp>
+        <p:nvSpPr>
+          <p:cNvPr id="5" name="Shape 3"/>
+          <p:cNvSpPr/>
+          <p:nvPr/>
+        </p:nvSpPr>
+        <p:spPr>
+          <a:xfrm>
+            <a:off x="548640" y="2377440"/>
+            <a:ext cx="2567864" cy="2606040"/>
           </a:xfrm>
           <a:prstGeom prst="roundRect">
             <a:avLst>
-              <a:gd name="adj" fmla="val 3642"/>
+              <a:gd name="adj" fmla="val 4985"/>
             </a:avLst>
           </a:prstGeom>
           <a:solidFill>
@@ -4989,170 +5167,207 @@
       </p:sp>
       <p:sp>
         <p:nvSpPr>
-          <p:cNvPr id="5" name="Shape 3"/>
-          <p:cNvSpPr/>
-          <p:nvPr/>
-        </p:nvSpPr>
-        <p:spPr>
-          <a:xfrm>
-            <a:off x="804672" y="1947672"/>
-            <a:ext cx="777240" cy="777240"/>
+          <p:cNvPr id="6" name="Shape 4"/>
+          <p:cNvSpPr/>
+          <p:nvPr/>
+        </p:nvSpPr>
+        <p:spPr>
+          <a:xfrm>
+            <a:off x="548640" y="2377440"/>
+            <a:ext cx="2567864" cy="73152"/>
+          </a:xfrm>
+          <a:prstGeom prst="rect">
+            <a:avLst/>
+          </a:prstGeom>
+          <a:solidFill>
+            <a:srgbClr val="30914C"/>
+          </a:solidFill>
+          <a:ln/>
+        </p:spPr>
+      </p:sp>
+      <p:sp>
+        <p:nvSpPr>
+          <p:cNvPr id="7" name="Shape 5"/>
+          <p:cNvSpPr/>
+          <p:nvPr/>
+        </p:nvSpPr>
+        <p:spPr>
+          <a:xfrm>
+            <a:off x="777240" y="2651760"/>
+            <a:ext cx="640080" cy="640080"/>
+          </a:xfrm>
+          <a:prstGeom prst="ellipse">
+            <a:avLst/>
+          </a:prstGeom>
+          <a:solidFill>
+            <a:srgbClr val="F5FAE5"/>
+          </a:solidFill>
+          <a:ln w="25400">
+            <a:solidFill>
+              <a:srgbClr val="30914C"/>
+            </a:solidFill>
+            <a:prstDash val="solid"/>
+          </a:ln>
+        </p:spPr>
+      </p:sp>
+      <p:sp>
+        <p:nvSpPr>
+          <p:cNvPr id="8" name="Text 6"/>
+          <p:cNvSpPr txBox="1"/>
+          <p:nvPr/>
+        </p:nvSpPr>
+        <p:spPr>
+          <a:xfrm>
+            <a:off x="777240" y="2651760"/>
+            <a:ext cx="640080" cy="640080"/>
+          </a:xfrm>
+          <a:prstGeom prst="rect">
+            <a:avLst/>
+          </a:prstGeom>
+          <a:noFill/>
+          <a:ln/>
+        </p:spPr>
+        <p:txBody>
+          <a:bodyPr wrap="square" lIns="0" tIns="0" rIns="0" bIns="0" rtlCol="0" anchor="ctr"/>
+          <a:lstStyle/>
+          <a:p>
+            <a:pPr algn="ctr" indent="0" marL="0">
+              <a:buNone/>
+            </a:pPr>
+            <a:r>
+              <a:rPr lang="en-US" sz="2400" b="1" dirty="0">
+                <a:solidFill>
+                  <a:srgbClr val="256F3A"/>
+                </a:solidFill>
+              </a:rPr>
+              <a:t>A</a:t>
+            </a:r>
+            <a:endParaRPr lang="en-US" sz="2400" dirty="0"/>
+          </a:p>
+        </p:txBody>
+      </p:sp>
+      <p:sp>
+        <p:nvSpPr>
+          <p:cNvPr id="9" name="Text 7"/>
+          <p:cNvSpPr txBox="1"/>
+          <p:nvPr/>
+        </p:nvSpPr>
+        <p:spPr>
+          <a:xfrm>
+            <a:off x="1554480" y="2651760"/>
+            <a:ext cx="1379144" cy="274320"/>
+          </a:xfrm>
+          <a:prstGeom prst="rect">
+            <a:avLst/>
+          </a:prstGeom>
+          <a:noFill/>
+          <a:ln/>
+        </p:spPr>
+        <p:txBody>
+          <a:bodyPr wrap="square" lIns="0" tIns="0" rIns="0" bIns="0" rtlCol="0" anchor="t"/>
+          <a:lstStyle/>
+          <a:p>
+            <a:pPr indent="0" marL="0">
+              <a:buNone/>
+            </a:pPr>
+            <a:r>
+              <a:rPr lang="en-US" sz="1200" b="1" dirty="0">
+                <a:solidFill>
+                  <a:srgbClr val="256F3A"/>
+                </a:solidFill>
+              </a:rPr>
+              <a:t>Nível A</a:t>
+            </a:r>
+            <a:endParaRPr lang="en-US" sz="1200" dirty="0"/>
+          </a:p>
+        </p:txBody>
+      </p:sp>
+      <p:sp>
+        <p:nvSpPr>
+          <p:cNvPr id="10" name="Text 8"/>
+          <p:cNvSpPr txBox="1"/>
+          <p:nvPr/>
+        </p:nvSpPr>
+        <p:spPr>
+          <a:xfrm>
+            <a:off x="1554480" y="2926080"/>
+            <a:ext cx="1379144" cy="411480"/>
+          </a:xfrm>
+          <a:prstGeom prst="rect">
+            <a:avLst/>
+          </a:prstGeom>
+          <a:noFill/>
+          <a:ln/>
+        </p:spPr>
+        <p:txBody>
+          <a:bodyPr wrap="square" lIns="0" tIns="0" rIns="0" bIns="0" rtlCol="0" anchor="t"/>
+          <a:lstStyle/>
+          <a:p>
+            <a:pPr indent="0" marL="0">
+              <a:buNone/>
+            </a:pPr>
+            <a:r>
+              <a:rPr lang="en-US" sz="1600" b="1" dirty="0">
+                <a:solidFill>
+                  <a:srgbClr val="1D2D3E"/>
+                </a:solidFill>
+              </a:rPr>
+              <a:t>Released APIs</a:t>
+            </a:r>
+            <a:endParaRPr lang="en-US" sz="1600" dirty="0"/>
+          </a:p>
+        </p:txBody>
+      </p:sp>
+      <p:sp>
+        <p:nvSpPr>
+          <p:cNvPr id="11" name="Text 9"/>
+          <p:cNvSpPr txBox="1"/>
+          <p:nvPr/>
+        </p:nvSpPr>
+        <p:spPr>
+          <a:xfrm>
+            <a:off x="777240" y="3474720"/>
+            <a:ext cx="2110664" cy="1371600"/>
+          </a:xfrm>
+          <a:prstGeom prst="rect">
+            <a:avLst/>
+          </a:prstGeom>
+          <a:noFill/>
+          <a:ln/>
+        </p:spPr>
+        <p:txBody>
+          <a:bodyPr wrap="square" lIns="0" tIns="0" rIns="0" bIns="0" rtlCol="0" anchor="t"/>
+          <a:lstStyle/>
+          <a:p>
+            <a:pPr indent="0" marL="0">
+              <a:buNone/>
+            </a:pPr>
+            <a:r>
+              <a:rPr lang="en-US" sz="1300" dirty="0">
+                <a:solidFill>
+                  <a:srgbClr val="556B82"/>
+                </a:solidFill>
+              </a:rPr>
+              <a:t>APIs e pontos de extensão liberados: ABAP Cloud on-stack, Key User e side-by-side na SAP BTP. Máxima estabilidade em upgrades.</a:t>
+            </a:r>
+            <a:endParaRPr lang="en-US" sz="1300" dirty="0"/>
+          </a:p>
+        </p:txBody>
+      </p:sp>
+      <p:sp>
+        <p:nvSpPr>
+          <p:cNvPr id="12" name="Shape 10"/>
+          <p:cNvSpPr/>
+          <p:nvPr/>
+        </p:nvSpPr>
+        <p:spPr>
+          <a:xfrm>
+            <a:off x="3390824" y="2377440"/>
+            <a:ext cx="2567864" cy="2606040"/>
           </a:xfrm>
           <a:prstGeom prst="roundRect">
             <a:avLst>
-              <a:gd name="adj" fmla="val 22000"/>
-            </a:avLst>
-          </a:prstGeom>
-          <a:solidFill>
-            <a:srgbClr val="EBF8FF"/>
-          </a:solidFill>
-          <a:ln/>
-        </p:spPr>
-      </p:sp>
-      <p:sp>
-        <p:nvSpPr>
-          <p:cNvPr id="6" name="Shape 4"/>
-          <p:cNvSpPr/>
-          <p:nvPr/>
-        </p:nvSpPr>
-        <p:spPr>
-          <a:xfrm>
-            <a:off x="3259226" y="1965960"/>
-            <a:ext cx="548640" cy="292608"/>
-          </a:xfrm>
-          <a:prstGeom prst="roundRect">
-            <a:avLst>
-              <a:gd name="adj" fmla="val 50000"/>
-            </a:avLst>
-          </a:prstGeom>
-          <a:solidFill>
-            <a:srgbClr val="EBF8FF"/>
-          </a:solidFill>
-          <a:ln/>
-        </p:spPr>
-      </p:sp>
-      <p:sp>
-        <p:nvSpPr>
-          <p:cNvPr id="7" name="Text 5"/>
-          <p:cNvSpPr txBox="1"/>
-          <p:nvPr/>
-        </p:nvSpPr>
-        <p:spPr>
-          <a:xfrm>
-            <a:off x="3259226" y="1965960"/>
-            <a:ext cx="548640" cy="292608"/>
-          </a:xfrm>
-          <a:prstGeom prst="rect">
-            <a:avLst/>
-          </a:prstGeom>
-          <a:noFill/>
-          <a:ln/>
-        </p:spPr>
-        <p:txBody>
-          <a:bodyPr wrap="square" lIns="0" tIns="0" rIns="0" bIns="0" rtlCol="0" anchor="ctr"/>
-          <a:lstStyle/>
-          <a:p>
-            <a:pPr algn="ctr" indent="0" marL="0">
-              <a:buNone/>
-            </a:pPr>
-            <a:r>
-              <a:rPr lang="en-US" sz="1100" b="1" dirty="0">
-                <a:solidFill>
-                  <a:srgbClr val="0064D9"/>
-                </a:solidFill>
-              </a:rPr>
-              <a:t>1</a:t>
-            </a:r>
-            <a:endParaRPr lang="en-US" sz="1100" dirty="0"/>
-          </a:p>
-        </p:txBody>
-      </p:sp>
-      <p:sp>
-        <p:nvSpPr>
-          <p:cNvPr id="8" name="Text 6"/>
-          <p:cNvSpPr txBox="1"/>
-          <p:nvPr/>
-        </p:nvSpPr>
-        <p:spPr>
-          <a:xfrm>
-            <a:off x="804672" y="2889504"/>
-            <a:ext cx="3003194" cy="2962656"/>
-          </a:xfrm>
-          <a:prstGeom prst="rect">
-            <a:avLst/>
-          </a:prstGeom>
-          <a:noFill/>
-          <a:ln/>
-        </p:spPr>
-        <p:txBody>
-          <a:bodyPr wrap="square" lIns="0" tIns="0" rIns="0" bIns="0" rtlCol="0" anchor="t"/>
-          <a:lstStyle/>
-          <a:p>
-            <a:pPr indent="0" marL="0">
-              <a:spcAft>
-                <a:spcPts val="600"/>
-              </a:spcAft>
-              <a:buNone/>
-            </a:pPr>
-            <a:r>
-              <a:rPr lang="en-US" sz="1900" b="1" dirty="0">
-                <a:solidFill>
-                  <a:srgbClr val="1D2D3E"/>
-                </a:solidFill>
-              </a:rPr>
-              <a:t>Regra de Ouro para o Novo</a:t>
-            </a:r>
-            <a:endParaRPr lang="en-US" sz="1600" dirty="0"/>
-          </a:p>
-          <a:p>
-            <a:pPr indent="0" marL="0">
-              <a:spcAft>
-                <a:spcPts val="400"/>
-              </a:spcAft>
-              <a:buNone/>
-            </a:pPr>
-            <a:r>
-              <a:rPr lang="en-US" sz="1500" dirty="0">
-                <a:solidFill>
-                  <a:srgbClr val="556B82"/>
-                </a:solidFill>
-              </a:rPr>
-              <a:t>Todo e qualquer novo desenvolvimento (relatórios, apps, APIs) deve ser feito obrigatoriamente usando </a:t>
-            </a:r>
-            <a:r>
-              <a:rPr lang="en-US" sz="1500" b="1" dirty="0">
-                <a:solidFill>
-                  <a:srgbClr val="556B82"/>
-                </a:solidFill>
-              </a:rPr>
-              <a:t>ABAP Cloud (Tier 2)</a:t>
-            </a:r>
-            <a:r>
-              <a:rPr lang="en-US" sz="1500" dirty="0">
-                <a:solidFill>
-                  <a:srgbClr val="556B82"/>
-                </a:solidFill>
-              </a:rPr>
-              <a:t>. Estabeleça isso como o novo padrão da sua equipe.</a:t>
-            </a:r>
-            <a:endParaRPr lang="en-US" sz="1600" dirty="0"/>
-          </a:p>
-        </p:txBody>
-      </p:sp>
-      <p:sp>
-        <p:nvSpPr>
-          <p:cNvPr id="9" name="Shape 7"/>
-          <p:cNvSpPr/>
-          <p:nvPr/>
-        </p:nvSpPr>
-        <p:spPr>
-          <a:xfrm>
-            <a:off x="4338218" y="1691640"/>
-            <a:ext cx="3515258" cy="4343400"/>
-          </a:xfrm>
-          <a:prstGeom prst="roundRect">
-            <a:avLst>
-              <a:gd name="adj" fmla="val 3642"/>
+              <a:gd name="adj" fmla="val 4985"/>
             </a:avLst>
           </a:prstGeom>
           <a:solidFill>
@@ -5175,186 +5390,207 @@
       </p:sp>
       <p:sp>
         <p:nvSpPr>
-          <p:cNvPr id="10" name="Shape 8"/>
-          <p:cNvSpPr/>
-          <p:nvPr/>
-        </p:nvSpPr>
-        <p:spPr>
-          <a:xfrm>
-            <a:off x="4594250" y="1947672"/>
-            <a:ext cx="777240" cy="777240"/>
-          </a:xfrm>
-          <a:prstGeom prst="roundRect">
-            <a:avLst>
-              <a:gd name="adj" fmla="val 22000"/>
-            </a:avLst>
+          <p:cNvPr id="13" name="Shape 11"/>
+          <p:cNvSpPr/>
+          <p:nvPr/>
+        </p:nvSpPr>
+        <p:spPr>
+          <a:xfrm>
+            <a:off x="3390824" y="2377440"/>
+            <a:ext cx="2567864" cy="73152"/>
+          </a:xfrm>
+          <a:prstGeom prst="rect">
+            <a:avLst/>
+          </a:prstGeom>
+          <a:solidFill>
+            <a:srgbClr val="0070F2"/>
+          </a:solidFill>
+          <a:ln/>
+        </p:spPr>
+      </p:sp>
+      <p:sp>
+        <p:nvSpPr>
+          <p:cNvPr id="14" name="Shape 12"/>
+          <p:cNvSpPr/>
+          <p:nvPr/>
+        </p:nvSpPr>
+        <p:spPr>
+          <a:xfrm>
+            <a:off x="3619424" y="2651760"/>
+            <a:ext cx="640080" cy="640080"/>
+          </a:xfrm>
+          <a:prstGeom prst="ellipse">
+            <a:avLst/>
           </a:prstGeom>
           <a:solidFill>
             <a:srgbClr val="EBF8FF"/>
           </a:solidFill>
-          <a:ln/>
-        </p:spPr>
-      </p:sp>
-      <p:sp>
-        <p:nvSpPr>
-          <p:cNvPr id="11" name="Shape 9"/>
-          <p:cNvSpPr/>
-          <p:nvPr/>
-        </p:nvSpPr>
-        <p:spPr>
-          <a:xfrm>
-            <a:off x="7048805" y="1965960"/>
-            <a:ext cx="548640" cy="292608"/>
+          <a:ln w="25400">
+            <a:solidFill>
+              <a:srgbClr val="0070F2"/>
+            </a:solidFill>
+            <a:prstDash val="solid"/>
+          </a:ln>
+        </p:spPr>
+      </p:sp>
+      <p:sp>
+        <p:nvSpPr>
+          <p:cNvPr id="15" name="Text 13"/>
+          <p:cNvSpPr txBox="1"/>
+          <p:nvPr/>
+        </p:nvSpPr>
+        <p:spPr>
+          <a:xfrm>
+            <a:off x="3619424" y="2651760"/>
+            <a:ext cx="640080" cy="640080"/>
+          </a:xfrm>
+          <a:prstGeom prst="rect">
+            <a:avLst/>
+          </a:prstGeom>
+          <a:noFill/>
+          <a:ln/>
+        </p:spPr>
+        <p:txBody>
+          <a:bodyPr wrap="square" lIns="0" tIns="0" rIns="0" bIns="0" rtlCol="0" anchor="ctr"/>
+          <a:lstStyle/>
+          <a:p>
+            <a:pPr algn="ctr" indent="0" marL="0">
+              <a:buNone/>
+            </a:pPr>
+            <a:r>
+              <a:rPr lang="en-US" sz="2400" b="1" dirty="0">
+                <a:solidFill>
+                  <a:srgbClr val="0064D9"/>
+                </a:solidFill>
+              </a:rPr>
+              <a:t>B</a:t>
+            </a:r>
+            <a:endParaRPr lang="en-US" sz="2400" dirty="0"/>
+          </a:p>
+        </p:txBody>
+      </p:sp>
+      <p:sp>
+        <p:nvSpPr>
+          <p:cNvPr id="16" name="Text 14"/>
+          <p:cNvSpPr txBox="1"/>
+          <p:nvPr/>
+        </p:nvSpPr>
+        <p:spPr>
+          <a:xfrm>
+            <a:off x="4396664" y="2651760"/>
+            <a:ext cx="1379144" cy="274320"/>
+          </a:xfrm>
+          <a:prstGeom prst="rect">
+            <a:avLst/>
+          </a:prstGeom>
+          <a:noFill/>
+          <a:ln/>
+        </p:spPr>
+        <p:txBody>
+          <a:bodyPr wrap="square" lIns="0" tIns="0" rIns="0" bIns="0" rtlCol="0" anchor="t"/>
+          <a:lstStyle/>
+          <a:p>
+            <a:pPr indent="0" marL="0">
+              <a:buNone/>
+            </a:pPr>
+            <a:r>
+              <a:rPr lang="en-US" sz="1200" b="1" dirty="0">
+                <a:solidFill>
+                  <a:srgbClr val="0064D9"/>
+                </a:solidFill>
+              </a:rPr>
+              <a:t>Nível B</a:t>
+            </a:r>
+            <a:endParaRPr lang="en-US" sz="1200" dirty="0"/>
+          </a:p>
+        </p:txBody>
+      </p:sp>
+      <p:sp>
+        <p:nvSpPr>
+          <p:cNvPr id="17" name="Text 15"/>
+          <p:cNvSpPr txBox="1"/>
+          <p:nvPr/>
+        </p:nvSpPr>
+        <p:spPr>
+          <a:xfrm>
+            <a:off x="4396664" y="2926080"/>
+            <a:ext cx="1379144" cy="411480"/>
+          </a:xfrm>
+          <a:prstGeom prst="rect">
+            <a:avLst/>
+          </a:prstGeom>
+          <a:noFill/>
+          <a:ln/>
+        </p:spPr>
+        <p:txBody>
+          <a:bodyPr wrap="square" lIns="0" tIns="0" rIns="0" bIns="0" rtlCol="0" anchor="t"/>
+          <a:lstStyle/>
+          <a:p>
+            <a:pPr indent="0" marL="0">
+              <a:buNone/>
+            </a:pPr>
+            <a:r>
+              <a:rPr lang="en-US" sz="1600" b="1" dirty="0">
+                <a:solidFill>
+                  <a:srgbClr val="1D2D3E"/>
+                </a:solidFill>
+              </a:rPr>
+              <a:t>Classic APIs</a:t>
+            </a:r>
+            <a:endParaRPr lang="en-US" sz="1600" dirty="0"/>
+          </a:p>
+        </p:txBody>
+      </p:sp>
+      <p:sp>
+        <p:nvSpPr>
+          <p:cNvPr id="18" name="Text 16"/>
+          <p:cNvSpPr txBox="1"/>
+          <p:nvPr/>
+        </p:nvSpPr>
+        <p:spPr>
+          <a:xfrm>
+            <a:off x="3619424" y="3474720"/>
+            <a:ext cx="2110664" cy="1371600"/>
+          </a:xfrm>
+          <a:prstGeom prst="rect">
+            <a:avLst/>
+          </a:prstGeom>
+          <a:noFill/>
+          <a:ln/>
+        </p:spPr>
+        <p:txBody>
+          <a:bodyPr wrap="square" lIns="0" tIns="0" rIns="0" bIns="0" rtlCol="0" anchor="t"/>
+          <a:lstStyle/>
+          <a:p>
+            <a:pPr indent="0" marL="0">
+              <a:buNone/>
+            </a:pPr>
+            <a:r>
+              <a:rPr lang="en-US" sz="1300" dirty="0">
+                <a:solidFill>
+                  <a:srgbClr val="556B82"/>
+                </a:solidFill>
+              </a:rPr>
+              <a:t>Artefatos clássicos (ex.: BAPIs) que a SAP classifica como estáveis para upgrade. Risco baixo.</a:t>
+            </a:r>
+            <a:endParaRPr lang="en-US" sz="1300" dirty="0"/>
+          </a:p>
+        </p:txBody>
+      </p:sp>
+      <p:sp>
+        <p:nvSpPr>
+          <p:cNvPr id="19" name="Shape 17"/>
+          <p:cNvSpPr/>
+          <p:nvPr/>
+        </p:nvSpPr>
+        <p:spPr>
+          <a:xfrm>
+            <a:off x="6233008" y="2377440"/>
+            <a:ext cx="2567864" cy="2606040"/>
           </a:xfrm>
           <a:prstGeom prst="roundRect">
             <a:avLst>
-              <a:gd name="adj" fmla="val 50000"/>
-            </a:avLst>
-          </a:prstGeom>
-          <a:solidFill>
-            <a:srgbClr val="EBF8FF"/>
-          </a:solidFill>
-          <a:ln/>
-        </p:spPr>
-      </p:sp>
-      <p:sp>
-        <p:nvSpPr>
-          <p:cNvPr id="12" name="Text 10"/>
-          <p:cNvSpPr txBox="1"/>
-          <p:nvPr/>
-        </p:nvSpPr>
-        <p:spPr>
-          <a:xfrm>
-            <a:off x="7048805" y="1965960"/>
-            <a:ext cx="548640" cy="292608"/>
-          </a:xfrm>
-          <a:prstGeom prst="rect">
-            <a:avLst/>
-          </a:prstGeom>
-          <a:noFill/>
-          <a:ln/>
-        </p:spPr>
-        <p:txBody>
-          <a:bodyPr wrap="square" lIns="0" tIns="0" rIns="0" bIns="0" rtlCol="0" anchor="ctr"/>
-          <a:lstStyle/>
-          <a:p>
-            <a:pPr algn="ctr" indent="0" marL="0">
-              <a:buNone/>
-            </a:pPr>
-            <a:r>
-              <a:rPr lang="en-US" sz="1100" b="1" dirty="0">
-                <a:solidFill>
-                  <a:srgbClr val="0064D9"/>
-                </a:solidFill>
-              </a:rPr>
-              <a:t>2</a:t>
-            </a:r>
-            <a:endParaRPr lang="en-US" sz="1100" dirty="0"/>
-          </a:p>
-        </p:txBody>
-      </p:sp>
-      <p:sp>
-        <p:nvSpPr>
-          <p:cNvPr id="13" name="Text 11"/>
-          <p:cNvSpPr txBox="1"/>
-          <p:nvPr/>
-        </p:nvSpPr>
-        <p:spPr>
-          <a:xfrm>
-            <a:off x="4594250" y="2889504"/>
-            <a:ext cx="3003194" cy="2962656"/>
-          </a:xfrm>
-          <a:prstGeom prst="rect">
-            <a:avLst/>
-          </a:prstGeom>
-          <a:noFill/>
-          <a:ln/>
-        </p:spPr>
-        <p:txBody>
-          <a:bodyPr wrap="square" lIns="0" tIns="0" rIns="0" bIns="0" rtlCol="0" anchor="t"/>
-          <a:lstStyle/>
-          <a:p>
-            <a:pPr indent="0" marL="0">
-              <a:spcAft>
-                <a:spcPts val="600"/>
-              </a:spcAft>
-              <a:buNone/>
-            </a:pPr>
-            <a:r>
-              <a:rPr lang="en-US" sz="1900" b="1" dirty="0">
-                <a:solidFill>
-                  <a:srgbClr val="1D2D3E"/>
-                </a:solidFill>
-              </a:rPr>
-              <a:t>Priorize Extensões “In-App”</a:t>
-            </a:r>
-            <a:endParaRPr lang="en-US" sz="1600" dirty="0"/>
-          </a:p>
-          <a:p>
-            <a:pPr indent="0" marL="0">
-              <a:spcAft>
-                <a:spcPts val="400"/>
-              </a:spcAft>
-              <a:buNone/>
-            </a:pPr>
-            <a:r>
-              <a:rPr lang="en-US" sz="1500" dirty="0">
-                <a:solidFill>
-                  <a:srgbClr val="556B82"/>
-                </a:solidFill>
-              </a:rPr>
-              <a:t>Antes de escrever código, verifique se a necessidade pode ser atendida com </a:t>
-            </a:r>
-            <a:r>
-              <a:rPr lang="en-US" sz="1500" b="1" dirty="0">
-                <a:solidFill>
-                  <a:srgbClr val="556B82"/>
-                </a:solidFill>
-              </a:rPr>
-              <a:t>Key User Extensibility (Tier 1)</a:t>
-            </a:r>
-            <a:r>
-              <a:rPr lang="en-US" sz="1500" dirty="0">
-                <a:solidFill>
-                  <a:srgbClr val="556B82"/>
-                </a:solidFill>
-              </a:rPr>
-              <a:t> ou </a:t>
-            </a:r>
-            <a:r>
-              <a:rPr lang="en-US" sz="1500" b="1" dirty="0">
-                <a:solidFill>
-                  <a:srgbClr val="556B82"/>
-                </a:solidFill>
-              </a:rPr>
-              <a:t>Cloud BAdIs</a:t>
-            </a:r>
-            <a:r>
-              <a:rPr lang="en-US" sz="1500" dirty="0">
-                <a:solidFill>
-                  <a:srgbClr val="556B82"/>
-                </a:solidFill>
-              </a:rPr>
-              <a:t>. Evite as User Exits antigas sempre que possível.</a:t>
-            </a:r>
-            <a:endParaRPr lang="en-US" sz="1600" dirty="0"/>
-          </a:p>
-        </p:txBody>
-      </p:sp>
-      <p:sp>
-        <p:nvSpPr>
-          <p:cNvPr id="14" name="Shape 12"/>
-          <p:cNvSpPr/>
-          <p:nvPr/>
-        </p:nvSpPr>
-        <p:spPr>
-          <a:xfrm>
-            <a:off x="8127797" y="1691640"/>
-            <a:ext cx="3515258" cy="4343400"/>
-          </a:xfrm>
-          <a:prstGeom prst="roundRect">
-            <a:avLst>
-              <a:gd name="adj" fmla="val 3642"/>
+              <a:gd name="adj" fmla="val 4985"/>
             </a:avLst>
           </a:prstGeom>
           <a:solidFill>
@@ -5377,18 +5613,430 @@
       </p:sp>
       <p:sp>
         <p:nvSpPr>
-          <p:cNvPr id="15" name="Shape 13"/>
-          <p:cNvSpPr/>
-          <p:nvPr/>
-        </p:nvSpPr>
-        <p:spPr>
-          <a:xfrm>
-            <a:off x="8383829" y="1947672"/>
-            <a:ext cx="777240" cy="777240"/>
+          <p:cNvPr id="20" name="Shape 18"/>
+          <p:cNvSpPr/>
+          <p:nvPr/>
+        </p:nvSpPr>
+        <p:spPr>
+          <a:xfrm>
+            <a:off x="6233008" y="2377440"/>
+            <a:ext cx="2567864" cy="73152"/>
+          </a:xfrm>
+          <a:prstGeom prst="rect">
+            <a:avLst/>
+          </a:prstGeom>
+          <a:solidFill>
+            <a:srgbClr val="E76500"/>
+          </a:solidFill>
+          <a:ln/>
+        </p:spPr>
+      </p:sp>
+      <p:sp>
+        <p:nvSpPr>
+          <p:cNvPr id="21" name="Shape 19"/>
+          <p:cNvSpPr/>
+          <p:nvPr/>
+        </p:nvSpPr>
+        <p:spPr>
+          <a:xfrm>
+            <a:off x="6461608" y="2651760"/>
+            <a:ext cx="640080" cy="640080"/>
+          </a:xfrm>
+          <a:prstGeom prst="ellipse">
+            <a:avLst/>
+          </a:prstGeom>
+          <a:solidFill>
+            <a:srgbClr val="FFF8D6"/>
+          </a:solidFill>
+          <a:ln w="25400">
+            <a:solidFill>
+              <a:srgbClr val="E76500"/>
+            </a:solidFill>
+            <a:prstDash val="solid"/>
+          </a:ln>
+        </p:spPr>
+      </p:sp>
+      <p:sp>
+        <p:nvSpPr>
+          <p:cNvPr id="22" name="Text 20"/>
+          <p:cNvSpPr txBox="1"/>
+          <p:nvPr/>
+        </p:nvSpPr>
+        <p:spPr>
+          <a:xfrm>
+            <a:off x="6461608" y="2651760"/>
+            <a:ext cx="640080" cy="640080"/>
+          </a:xfrm>
+          <a:prstGeom prst="rect">
+            <a:avLst/>
+          </a:prstGeom>
+          <a:noFill/>
+          <a:ln/>
+        </p:spPr>
+        <p:txBody>
+          <a:bodyPr wrap="square" lIns="0" tIns="0" rIns="0" bIns="0" rtlCol="0" anchor="ctr"/>
+          <a:lstStyle/>
+          <a:p>
+            <a:pPr algn="ctr" indent="0" marL="0">
+              <a:buNone/>
+            </a:pPr>
+            <a:r>
+              <a:rPr lang="en-US" sz="2400" b="1" dirty="0">
+                <a:solidFill>
+                  <a:srgbClr val="B44F00"/>
+                </a:solidFill>
+              </a:rPr>
+              <a:t>C</a:t>
+            </a:r>
+            <a:endParaRPr lang="en-US" sz="2400" dirty="0"/>
+          </a:p>
+        </p:txBody>
+      </p:sp>
+      <p:sp>
+        <p:nvSpPr>
+          <p:cNvPr id="23" name="Text 21"/>
+          <p:cNvSpPr txBox="1"/>
+          <p:nvPr/>
+        </p:nvSpPr>
+        <p:spPr>
+          <a:xfrm>
+            <a:off x="7238848" y="2651760"/>
+            <a:ext cx="1379144" cy="274320"/>
+          </a:xfrm>
+          <a:prstGeom prst="rect">
+            <a:avLst/>
+          </a:prstGeom>
+          <a:noFill/>
+          <a:ln/>
+        </p:spPr>
+        <p:txBody>
+          <a:bodyPr wrap="square" lIns="0" tIns="0" rIns="0" bIns="0" rtlCol="0" anchor="t"/>
+          <a:lstStyle/>
+          <a:p>
+            <a:pPr indent="0" marL="0">
+              <a:buNone/>
+            </a:pPr>
+            <a:r>
+              <a:rPr lang="en-US" sz="1200" b="1" dirty="0">
+                <a:solidFill>
+                  <a:srgbClr val="B44F00"/>
+                </a:solidFill>
+              </a:rPr>
+              <a:t>Nível C</a:t>
+            </a:r>
+            <a:endParaRPr lang="en-US" sz="1200" dirty="0"/>
+          </a:p>
+        </p:txBody>
+      </p:sp>
+      <p:sp>
+        <p:nvSpPr>
+          <p:cNvPr id="24" name="Text 22"/>
+          <p:cNvSpPr txBox="1"/>
+          <p:nvPr/>
+        </p:nvSpPr>
+        <p:spPr>
+          <a:xfrm>
+            <a:off x="7238848" y="2926080"/>
+            <a:ext cx="1379144" cy="411480"/>
+          </a:xfrm>
+          <a:prstGeom prst="rect">
+            <a:avLst/>
+          </a:prstGeom>
+          <a:noFill/>
+          <a:ln/>
+        </p:spPr>
+        <p:txBody>
+          <a:bodyPr wrap="square" lIns="0" tIns="0" rIns="0" bIns="0" rtlCol="0" anchor="t"/>
+          <a:lstStyle/>
+          <a:p>
+            <a:pPr indent="0" marL="0">
+              <a:buNone/>
+            </a:pPr>
+            <a:r>
+              <a:rPr lang="en-US" sz="1600" b="1" dirty="0">
+                <a:solidFill>
+                  <a:srgbClr val="1D2D3E"/>
+                </a:solidFill>
+              </a:rPr>
+              <a:t>Objetos internos</a:t>
+            </a:r>
+            <a:endParaRPr lang="en-US" sz="1600" dirty="0"/>
+          </a:p>
+        </p:txBody>
+      </p:sp>
+      <p:sp>
+        <p:nvSpPr>
+          <p:cNvPr id="25" name="Text 23"/>
+          <p:cNvSpPr txBox="1"/>
+          <p:nvPr/>
+        </p:nvSpPr>
+        <p:spPr>
+          <a:xfrm>
+            <a:off x="6461608" y="3474720"/>
+            <a:ext cx="2110664" cy="1371600"/>
+          </a:xfrm>
+          <a:prstGeom prst="rect">
+            <a:avLst/>
+          </a:prstGeom>
+          <a:noFill/>
+          <a:ln/>
+        </p:spPr>
+        <p:txBody>
+          <a:bodyPr wrap="square" lIns="0" tIns="0" rIns="0" bIns="0" rtlCol="0" anchor="t"/>
+          <a:lstStyle/>
+          <a:p>
+            <a:pPr indent="0" marL="0">
+              <a:buNone/>
+            </a:pPr>
+            <a:r>
+              <a:rPr lang="en-US" sz="1300" dirty="0">
+                <a:solidFill>
+                  <a:srgbClr val="556B82"/>
+                </a:solidFill>
+              </a:rPr>
+              <a:t>Objetos não classificados como API. Risco gerenciável, acompanhado pelo changelog da SAP e por verificações do ATC.</a:t>
+            </a:r>
+            <a:endParaRPr lang="en-US" sz="1300" dirty="0"/>
+          </a:p>
+        </p:txBody>
+      </p:sp>
+      <p:sp>
+        <p:nvSpPr>
+          <p:cNvPr id="26" name="Shape 24"/>
+          <p:cNvSpPr/>
+          <p:nvPr/>
+        </p:nvSpPr>
+        <p:spPr>
+          <a:xfrm>
+            <a:off x="9075191" y="2377440"/>
+            <a:ext cx="2567864" cy="2606040"/>
           </a:xfrm>
           <a:prstGeom prst="roundRect">
             <a:avLst>
-              <a:gd name="adj" fmla="val 22000"/>
+              <a:gd name="adj" fmla="val 4985"/>
+            </a:avLst>
+          </a:prstGeom>
+          <a:solidFill>
+            <a:srgbClr val="FFFFFF"/>
+          </a:solidFill>
+          <a:ln w="9525">
+            <a:solidFill>
+              <a:srgbClr val="E5E5E5"/>
+            </a:solidFill>
+            <a:prstDash val="solid"/>
+          </a:ln>
+          <a:effectLst>
+            <a:outerShdw sx="100000" sy="100000" kx="0" ky="0" algn="bl" rotWithShape="0" blurRad="76200" dist="19050" dir="5400000">
+              <a:srgbClr val="1D2D3E">
+                <a:alpha val="10000"/>
+              </a:srgbClr>
+            </a:outerShdw>
+          </a:effectLst>
+        </p:spPr>
+      </p:sp>
+      <p:sp>
+        <p:nvSpPr>
+          <p:cNvPr id="27" name="Shape 25"/>
+          <p:cNvSpPr/>
+          <p:nvPr/>
+        </p:nvSpPr>
+        <p:spPr>
+          <a:xfrm>
+            <a:off x="9075191" y="2377440"/>
+            <a:ext cx="2567864" cy="73152"/>
+          </a:xfrm>
+          <a:prstGeom prst="rect">
+            <a:avLst/>
+          </a:prstGeom>
+          <a:solidFill>
+            <a:srgbClr val="D20A0A"/>
+          </a:solidFill>
+          <a:ln/>
+        </p:spPr>
+      </p:sp>
+      <p:sp>
+        <p:nvSpPr>
+          <p:cNvPr id="28" name="Shape 26"/>
+          <p:cNvSpPr/>
+          <p:nvPr/>
+        </p:nvSpPr>
+        <p:spPr>
+          <a:xfrm>
+            <a:off x="9303791" y="2651760"/>
+            <a:ext cx="640080" cy="640080"/>
+          </a:xfrm>
+          <a:prstGeom prst="ellipse">
+            <a:avLst/>
+          </a:prstGeom>
+          <a:solidFill>
+            <a:srgbClr val="FFEAF4"/>
+          </a:solidFill>
+          <a:ln w="25400">
+            <a:solidFill>
+              <a:srgbClr val="D20A0A"/>
+            </a:solidFill>
+            <a:prstDash val="solid"/>
+          </a:ln>
+        </p:spPr>
+      </p:sp>
+      <p:sp>
+        <p:nvSpPr>
+          <p:cNvPr id="29" name="Text 27"/>
+          <p:cNvSpPr txBox="1"/>
+          <p:nvPr/>
+        </p:nvSpPr>
+        <p:spPr>
+          <a:xfrm>
+            <a:off x="9303791" y="2651760"/>
+            <a:ext cx="640080" cy="640080"/>
+          </a:xfrm>
+          <a:prstGeom prst="rect">
+            <a:avLst/>
+          </a:prstGeom>
+          <a:noFill/>
+          <a:ln/>
+        </p:spPr>
+        <p:txBody>
+          <a:bodyPr wrap="square" lIns="0" tIns="0" rIns="0" bIns="0" rtlCol="0" anchor="ctr"/>
+          <a:lstStyle/>
+          <a:p>
+            <a:pPr algn="ctr" indent="0" marL="0">
+              <a:buNone/>
+            </a:pPr>
+            <a:r>
+              <a:rPr lang="en-US" sz="2400" b="1" dirty="0">
+                <a:solidFill>
+                  <a:srgbClr val="AA0808"/>
+                </a:solidFill>
+              </a:rPr>
+              <a:t>D</a:t>
+            </a:r>
+            <a:endParaRPr lang="en-US" sz="2400" dirty="0"/>
+          </a:p>
+        </p:txBody>
+      </p:sp>
+      <p:sp>
+        <p:nvSpPr>
+          <p:cNvPr id="30" name="Text 28"/>
+          <p:cNvSpPr txBox="1"/>
+          <p:nvPr/>
+        </p:nvSpPr>
+        <p:spPr>
+          <a:xfrm>
+            <a:off x="10081031" y="2651760"/>
+            <a:ext cx="1379144" cy="274320"/>
+          </a:xfrm>
+          <a:prstGeom prst="rect">
+            <a:avLst/>
+          </a:prstGeom>
+          <a:noFill/>
+          <a:ln/>
+        </p:spPr>
+        <p:txBody>
+          <a:bodyPr wrap="square" lIns="0" tIns="0" rIns="0" bIns="0" rtlCol="0" anchor="t"/>
+          <a:lstStyle/>
+          <a:p>
+            <a:pPr indent="0" marL="0">
+              <a:buNone/>
+            </a:pPr>
+            <a:r>
+              <a:rPr lang="en-US" sz="1200" b="1" dirty="0">
+                <a:solidFill>
+                  <a:srgbClr val="AA0808"/>
+                </a:solidFill>
+              </a:rPr>
+              <a:t>Nível D</a:t>
+            </a:r>
+            <a:endParaRPr lang="en-US" sz="1200" dirty="0"/>
+          </a:p>
+        </p:txBody>
+      </p:sp>
+      <p:sp>
+        <p:nvSpPr>
+          <p:cNvPr id="31" name="Text 29"/>
+          <p:cNvSpPr txBox="1"/>
+          <p:nvPr/>
+        </p:nvSpPr>
+        <p:spPr>
+          <a:xfrm>
+            <a:off x="10081031" y="2926080"/>
+            <a:ext cx="1379144" cy="411480"/>
+          </a:xfrm>
+          <a:prstGeom prst="rect">
+            <a:avLst/>
+          </a:prstGeom>
+          <a:noFill/>
+          <a:ln/>
+        </p:spPr>
+        <p:txBody>
+          <a:bodyPr wrap="square" lIns="0" tIns="0" rIns="0" bIns="0" rtlCol="0" anchor="t"/>
+          <a:lstStyle/>
+          <a:p>
+            <a:pPr indent="0" marL="0">
+              <a:buNone/>
+            </a:pPr>
+            <a:r>
+              <a:rPr lang="en-US" sz="1600" b="1" dirty="0">
+                <a:solidFill>
+                  <a:srgbClr val="1D2D3E"/>
+                </a:solidFill>
+              </a:rPr>
+              <a:t>Não recomendado</a:t>
+            </a:r>
+            <a:endParaRPr lang="en-US" sz="1600" dirty="0"/>
+          </a:p>
+        </p:txBody>
+      </p:sp>
+      <p:sp>
+        <p:nvSpPr>
+          <p:cNvPr id="32" name="Text 30"/>
+          <p:cNvSpPr txBox="1"/>
+          <p:nvPr/>
+        </p:nvSpPr>
+        <p:spPr>
+          <a:xfrm>
+            <a:off x="9303791" y="3474720"/>
+            <a:ext cx="2110664" cy="1371600"/>
+          </a:xfrm>
+          <a:prstGeom prst="rect">
+            <a:avLst/>
+          </a:prstGeom>
+          <a:noFill/>
+          <a:ln/>
+        </p:spPr>
+        <p:txBody>
+          <a:bodyPr wrap="square" lIns="0" tIns="0" rIns="0" bIns="0" rtlCol="0" anchor="t"/>
+          <a:lstStyle/>
+          <a:p>
+            <a:pPr indent="0" marL="0">
+              <a:buNone/>
+            </a:pPr>
+            <a:r>
+              <a:rPr lang="en-US" sz="1300" dirty="0">
+                <a:solidFill>
+                  <a:srgbClr val="556B82"/>
+                </a:solidFill>
+              </a:rPr>
+              <a:t>Modificações, escrita direta em tabelas SAP, enhancements implícitos. Maior dívida técnica: remediar.</a:t>
+            </a:r>
+            <a:endParaRPr lang="en-US" sz="1300" dirty="0"/>
+          </a:p>
+        </p:txBody>
+      </p:sp>
+      <p:sp>
+        <p:nvSpPr>
+          <p:cNvPr id="33" name="Shape 31"/>
+          <p:cNvSpPr/>
+          <p:nvPr/>
+        </p:nvSpPr>
+        <p:spPr>
+          <a:xfrm>
+            <a:off x="548640" y="5212080"/>
+            <a:ext cx="11094415" cy="822960"/>
+          </a:xfrm>
+          <a:prstGeom prst="roundRect">
+            <a:avLst>
+              <a:gd name="adj" fmla="val 13333"/>
             </a:avLst>
           </a:prstGeom>
           <a:solidFill>
@@ -5399,36 +6047,14 @@
       </p:sp>
       <p:sp>
         <p:nvSpPr>
-          <p:cNvPr id="16" name="Shape 14"/>
-          <p:cNvSpPr/>
-          <p:nvPr/>
-        </p:nvSpPr>
-        <p:spPr>
-          <a:xfrm>
-            <a:off x="10838383" y="1965960"/>
-            <a:ext cx="548640" cy="292608"/>
-          </a:xfrm>
-          <a:prstGeom prst="roundRect">
-            <a:avLst>
-              <a:gd name="adj" fmla="val 50000"/>
-            </a:avLst>
-          </a:prstGeom>
-          <a:solidFill>
-            <a:srgbClr val="EBF8FF"/>
-          </a:solidFill>
-          <a:ln/>
-        </p:spPr>
-      </p:sp>
-      <p:sp>
-        <p:nvSpPr>
-          <p:cNvPr id="17" name="Text 15"/>
+          <p:cNvPr id="34" name="Text 32"/>
           <p:cNvSpPr txBox="1"/>
           <p:nvPr/>
         </p:nvSpPr>
         <p:spPr>
           <a:xfrm>
-            <a:off x="10838383" y="1965960"/>
-            <a:ext cx="548640" cy="292608"/>
+            <a:off x="1280160" y="5212080"/>
+            <a:ext cx="10088575" cy="822960"/>
           </a:xfrm>
           <a:prstGeom prst="rect">
             <a:avLst/>
@@ -5440,88 +6066,48 @@
           <a:bodyPr wrap="square" lIns="0" tIns="0" rIns="0" bIns="0" rtlCol="0" anchor="ctr"/>
           <a:lstStyle/>
           <a:p>
-            <a:pPr algn="ctr" indent="0" marL="0">
-              <a:buNone/>
-            </a:pPr>
-            <a:r>
-              <a:rPr lang="en-US" sz="1100" b="1" dirty="0">
-                <a:solidFill>
-                  <a:srgbClr val="0064D9"/>
-                </a:solidFill>
-              </a:rPr>
-              <a:t>3</a:t>
-            </a:r>
-            <a:endParaRPr lang="en-US" sz="1100" dirty="0"/>
-          </a:p>
-        </p:txBody>
-      </p:sp>
-      <p:sp>
-        <p:nvSpPr>
-          <p:cNvPr id="18" name="Text 16"/>
-          <p:cNvSpPr txBox="1"/>
-          <p:nvPr/>
-        </p:nvSpPr>
-        <p:spPr>
-          <a:xfrm>
-            <a:off x="8383829" y="2889504"/>
-            <a:ext cx="3003194" cy="2962656"/>
-          </a:xfrm>
-          <a:prstGeom prst="rect">
-            <a:avLst/>
-          </a:prstGeom>
-          <a:noFill/>
-          <a:ln/>
-        </p:spPr>
-        <p:txBody>
-          <a:bodyPr wrap="square" lIns="0" tIns="0" rIns="0" bIns="0" rtlCol="0" anchor="t"/>
-          <a:lstStyle/>
-          <a:p>
             <a:pPr indent="0" marL="0">
-              <a:spcAft>
-                <a:spcPts val="600"/>
-              </a:spcAft>
-              <a:buNone/>
-            </a:pPr>
-            <a:r>
-              <a:rPr lang="en-US" sz="1900" b="1" dirty="0">
+              <a:buNone/>
+            </a:pPr>
+            <a:r>
+              <a:rPr lang="en-US" sz="1400" dirty="0">
                 <a:solidFill>
                   <a:srgbClr val="1D2D3E"/>
                 </a:solidFill>
               </a:rPr>
-              <a:t>Envelopar, Não Replicar o Legado</a:t>
-            </a:r>
-            <a:endParaRPr lang="en-US" sz="1600" dirty="0"/>
-          </a:p>
-          <a:p>
-            <a:pPr indent="0" marL="0">
-              <a:spcAft>
-                <a:spcPts val="400"/>
-              </a:spcAft>
-              <a:buNone/>
-            </a:pPr>
-            <a:r>
-              <a:rPr lang="en-US" sz="1500" dirty="0">
-                <a:solidFill>
-                  <a:srgbClr val="556B82"/>
-                </a:solidFill>
-              </a:rPr>
-              <a:t>Quando uma lógica de negócio antiga e crítica precisar ser usada em um novo desenvolvimento, </a:t>
-            </a:r>
-            <a:r>
-              <a:rPr lang="en-US" sz="1500" b="1" dirty="0">
-                <a:solidFill>
-                  <a:srgbClr val="556B82"/>
-                </a:solidFill>
-              </a:rPr>
-              <a:t>encapsule-a em um Wrapper</a:t>
-            </a:r>
-            <a:r>
-              <a:rPr lang="en-US" sz="1500" dirty="0">
-                <a:solidFill>
-                  <a:srgbClr val="556B82"/>
-                </a:solidFill>
-              </a:rPr>
-              <a:t>. Não reescreva nem duplique a lógica.</a:t>
+              <a:t>Uma extensão é avaliada pelo </a:t>
+            </a:r>
+            <a:r>
+              <a:rPr lang="en-US" sz="1400" b="1" dirty="0">
+                <a:solidFill>
+                  <a:srgbClr val="1D2D3E"/>
+                </a:solidFill>
+              </a:rPr>
+              <a:t>objeto de menor nível</a:t>
+            </a:r>
+            <a:r>
+              <a:rPr lang="en-US" sz="1400" dirty="0">
+                <a:solidFill>
+                  <a:srgbClr val="1D2D3E"/>
+                </a:solidFill>
+              </a:rPr>
+              <a:t> que ela usa. Wrappers já construídos no modelo de Tiers (Tier 2) </a:t>
+            </a:r>
+            <a:r>
+              <a:rPr lang="en-US" sz="1400" b="1" dirty="0">
+                <a:solidFill>
+                  <a:srgbClr val="1D2D3E"/>
+                </a:solidFill>
+              </a:rPr>
+              <a:t>não precisam ser migrados</a:t>
+            </a:r>
+            <a:r>
+              <a:rPr lang="en-US" sz="1400" dirty="0">
+                <a:solidFill>
+                  <a:srgbClr val="1D2D3E"/>
+                </a:solidFill>
+              </a:rPr>
+              <a:t>: o objetivo é subir de nível sempre que possível.</a:t>
             </a:r>
             <a:endParaRPr lang="en-US" sz="1600" dirty="0"/>
           </a:p>
@@ -5529,7 +6115,7 @@
       </p:sp>
       <p:pic>
         <p:nvPicPr>
-          <p:cNvPr id="19" name="Image 0" descr="preencoded.png">    </p:cNvPr>
+          <p:cNvPr id="35" name="Image 0" descr="preencoded.png">    </p:cNvPr>
           <p:cNvPicPr>
             <a:picLocks noChangeAspect="1"/>
           </p:cNvPicPr>
@@ -5543,56 +6129,8 @@
         </p:blipFill>
         <p:spPr>
           <a:xfrm>
-            <a:off x="991210" y="2134210"/>
-            <a:ext cx="404165" cy="404165"/>
-          </a:xfrm>
-          <a:prstGeom prst="rect">
-            <a:avLst/>
-          </a:prstGeom>
-        </p:spPr>
-      </p:pic>
-      <p:pic>
-        <p:nvPicPr>
-          <p:cNvPr id="20" name="Image 1" descr="preencoded.png">    </p:cNvPr>
-          <p:cNvPicPr>
-            <a:picLocks noChangeAspect="1"/>
-          </p:cNvPicPr>
-          <p:nvPr/>
-        </p:nvPicPr>
-        <p:blipFill>
-          <a:blip r:embed="rId2"/>
-          <a:stretch>
-            <a:fillRect/>
-          </a:stretch>
-        </p:blipFill>
-        <p:spPr>
-          <a:xfrm>
-            <a:off x="8570366" y="2134210"/>
-            <a:ext cx="404165" cy="404165"/>
-          </a:xfrm>
-          <a:prstGeom prst="rect">
-            <a:avLst/>
-          </a:prstGeom>
-        </p:spPr>
-      </p:pic>
-      <p:pic>
-        <p:nvPicPr>
-          <p:cNvPr id="21" name="Image 2" descr="preencoded.png">    </p:cNvPr>
-          <p:cNvPicPr>
-            <a:picLocks noChangeAspect="1"/>
-          </p:cNvPicPr>
-          <p:nvPr/>
-        </p:nvPicPr>
-        <p:blipFill>
-          <a:blip r:embed="rId3"/>
-          <a:stretch>
-            <a:fillRect/>
-          </a:stretch>
-        </p:blipFill>
-        <p:spPr>
-          <a:xfrm>
-            <a:off x="4780788" y="2134210"/>
-            <a:ext cx="404165" cy="404165"/>
+            <a:off x="777240" y="5449824"/>
+            <a:ext cx="347472" cy="347472"/>
           </a:xfrm>
           <a:prstGeom prst="rect">
             <a:avLst/>
@@ -5674,6 +6212,44 @@
           <p:cNvPr id="2" name="Text 0"/>
           <p:cNvSpPr/>
           <p:nvPr>
+            <p:ph idx="100" type="body" hasCustomPrompt="1"/>
+          </p:nvPr>
+        </p:nvSpPr>
+        <p:spPr>
+          <a:xfrm>
+            <a:off x="548640" y="384048"/>
+            <a:ext cx="11094415" cy="292608"/>
+          </a:xfrm>
+          <a:prstGeom prst="rect">
+            <a:avLst/>
+          </a:prstGeom>
+          <a:noFill/>
+          <a:ln/>
+        </p:spPr>
+        <p:txBody>
+          <a:bodyPr wrap="square" lIns="0" tIns="0" rIns="0" bIns="0" rtlCol="0" anchor="ctr"/>
+          <a:lstStyle/>
+          <a:p>
+            <a:pPr algn="l" indent="0" marL="0">
+              <a:buNone/>
+            </a:pPr>
+            <a:r>
+              <a:rPr lang="en-US" sz="1300" b="1" dirty="0">
+                <a:solidFill>
+                  <a:srgbClr val="0070F2"/>
+                </a:solidFill>
+              </a:rPr>
+              <a:t>Seu Plano de Ação</a:t>
+            </a:r>
+            <a:endParaRPr lang="en-US" sz="1300" dirty="0"/>
+          </a:p>
+        </p:txBody>
+      </p:sp>
+      <p:sp>
+        <p:nvSpPr>
+          <p:cNvPr id="3" name="Text 0"/>
+          <p:cNvSpPr/>
+          <p:nvPr>
             <p:ph idx="101" type="title" hasCustomPrompt="1"/>
           </p:nvPr>
         </p:nvSpPr>
@@ -5701,6 +6277,760 @@
                   <a:srgbClr val="1D2D3E"/>
                 </a:solidFill>
               </a:rPr>
+              <a:t>A Estratégia de 3 Passos para o Clean Core</a:t>
+            </a:r>
+            <a:endParaRPr lang="en-US" sz="3000" dirty="0"/>
+          </a:p>
+        </p:txBody>
+      </p:sp>
+      <p:sp>
+        <p:nvSpPr>
+          <p:cNvPr id="4" name="Shape 2"/>
+          <p:cNvSpPr/>
+          <p:nvPr/>
+        </p:nvSpPr>
+        <p:spPr>
+          <a:xfrm>
+            <a:off x="548640" y="1691640"/>
+            <a:ext cx="3515258" cy="4343400"/>
+          </a:xfrm>
+          <a:prstGeom prst="roundRect">
+            <a:avLst>
+              <a:gd name="adj" fmla="val 3642"/>
+            </a:avLst>
+          </a:prstGeom>
+          <a:solidFill>
+            <a:srgbClr val="FFFFFF"/>
+          </a:solidFill>
+          <a:ln w="9525">
+            <a:solidFill>
+              <a:srgbClr val="E5E5E5"/>
+            </a:solidFill>
+            <a:prstDash val="solid"/>
+          </a:ln>
+          <a:effectLst>
+            <a:outerShdw sx="100000" sy="100000" kx="0" ky="0" algn="bl" rotWithShape="0" blurRad="76200" dist="19050" dir="5400000">
+              <a:srgbClr val="1D2D3E">
+                <a:alpha val="10000"/>
+              </a:srgbClr>
+            </a:outerShdw>
+          </a:effectLst>
+        </p:spPr>
+      </p:sp>
+      <p:sp>
+        <p:nvSpPr>
+          <p:cNvPr id="5" name="Shape 3"/>
+          <p:cNvSpPr/>
+          <p:nvPr/>
+        </p:nvSpPr>
+        <p:spPr>
+          <a:xfrm>
+            <a:off x="804672" y="1947672"/>
+            <a:ext cx="777240" cy="777240"/>
+          </a:xfrm>
+          <a:prstGeom prst="roundRect">
+            <a:avLst>
+              <a:gd name="adj" fmla="val 22000"/>
+            </a:avLst>
+          </a:prstGeom>
+          <a:solidFill>
+            <a:srgbClr val="EBF8FF"/>
+          </a:solidFill>
+          <a:ln/>
+        </p:spPr>
+      </p:sp>
+      <p:sp>
+        <p:nvSpPr>
+          <p:cNvPr id="6" name="Shape 4"/>
+          <p:cNvSpPr/>
+          <p:nvPr/>
+        </p:nvSpPr>
+        <p:spPr>
+          <a:xfrm>
+            <a:off x="3259226" y="1965960"/>
+            <a:ext cx="548640" cy="292608"/>
+          </a:xfrm>
+          <a:prstGeom prst="roundRect">
+            <a:avLst>
+              <a:gd name="adj" fmla="val 50000"/>
+            </a:avLst>
+          </a:prstGeom>
+          <a:solidFill>
+            <a:srgbClr val="EBF8FF"/>
+          </a:solidFill>
+          <a:ln/>
+        </p:spPr>
+      </p:sp>
+      <p:sp>
+        <p:nvSpPr>
+          <p:cNvPr id="7" name="Text 5"/>
+          <p:cNvSpPr txBox="1"/>
+          <p:nvPr/>
+        </p:nvSpPr>
+        <p:spPr>
+          <a:xfrm>
+            <a:off x="3259226" y="1965960"/>
+            <a:ext cx="548640" cy="292608"/>
+          </a:xfrm>
+          <a:prstGeom prst="rect">
+            <a:avLst/>
+          </a:prstGeom>
+          <a:noFill/>
+          <a:ln/>
+        </p:spPr>
+        <p:txBody>
+          <a:bodyPr wrap="square" lIns="0" tIns="0" rIns="0" bIns="0" rtlCol="0" anchor="ctr"/>
+          <a:lstStyle/>
+          <a:p>
+            <a:pPr algn="ctr" indent="0" marL="0">
+              <a:buNone/>
+            </a:pPr>
+            <a:r>
+              <a:rPr lang="en-US" sz="1100" b="1" dirty="0">
+                <a:solidFill>
+                  <a:srgbClr val="0064D9"/>
+                </a:solidFill>
+              </a:rPr>
+              <a:t>1</a:t>
+            </a:r>
+            <a:endParaRPr lang="en-US" sz="1100" dirty="0"/>
+          </a:p>
+        </p:txBody>
+      </p:sp>
+      <p:sp>
+        <p:nvSpPr>
+          <p:cNvPr id="8" name="Text 6"/>
+          <p:cNvSpPr txBox="1"/>
+          <p:nvPr/>
+        </p:nvSpPr>
+        <p:spPr>
+          <a:xfrm>
+            <a:off x="804672" y="2889504"/>
+            <a:ext cx="3003194" cy="2962656"/>
+          </a:xfrm>
+          <a:prstGeom prst="rect">
+            <a:avLst/>
+          </a:prstGeom>
+          <a:noFill/>
+          <a:ln/>
+        </p:spPr>
+        <p:txBody>
+          <a:bodyPr wrap="square" lIns="0" tIns="0" rIns="0" bIns="0" rtlCol="0" anchor="t"/>
+          <a:lstStyle/>
+          <a:p>
+            <a:pPr indent="0" marL="0">
+              <a:spcAft>
+                <a:spcPts val="600"/>
+              </a:spcAft>
+              <a:buNone/>
+            </a:pPr>
+            <a:r>
+              <a:rPr lang="en-US" sz="1900" b="1" dirty="0">
+                <a:solidFill>
+                  <a:srgbClr val="1D2D3E"/>
+                </a:solidFill>
+              </a:rPr>
+              <a:t>Regra de Ouro para o Novo</a:t>
+            </a:r>
+            <a:endParaRPr lang="en-US" sz="1600" dirty="0"/>
+          </a:p>
+          <a:p>
+            <a:pPr indent="0" marL="0">
+              <a:spcAft>
+                <a:spcPts val="400"/>
+              </a:spcAft>
+              <a:buNone/>
+            </a:pPr>
+            <a:r>
+              <a:rPr lang="en-US" sz="1500" dirty="0">
+                <a:solidFill>
+                  <a:srgbClr val="556B82"/>
+                </a:solidFill>
+              </a:rPr>
+              <a:t>Todo e qualquer novo desenvolvimento (relatórios, apps, APIs) deve ser feito obrigatoriamente usando </a:t>
+            </a:r>
+            <a:r>
+              <a:rPr lang="en-US" sz="1500" b="1" dirty="0">
+                <a:solidFill>
+                  <a:srgbClr val="556B82"/>
+                </a:solidFill>
+              </a:rPr>
+              <a:t>ABAP Cloud (Tier 1)</a:t>
+            </a:r>
+            <a:r>
+              <a:rPr lang="en-US" sz="1500" dirty="0">
+                <a:solidFill>
+                  <a:srgbClr val="556B82"/>
+                </a:solidFill>
+              </a:rPr>
+              <a:t>. Estabeleça isso como o novo padrão da sua equipe.</a:t>
+            </a:r>
+            <a:endParaRPr lang="en-US" sz="1600" dirty="0"/>
+          </a:p>
+        </p:txBody>
+      </p:sp>
+      <p:sp>
+        <p:nvSpPr>
+          <p:cNvPr id="9" name="Shape 7"/>
+          <p:cNvSpPr/>
+          <p:nvPr/>
+        </p:nvSpPr>
+        <p:spPr>
+          <a:xfrm>
+            <a:off x="4338218" y="1691640"/>
+            <a:ext cx="3515258" cy="4343400"/>
+          </a:xfrm>
+          <a:prstGeom prst="roundRect">
+            <a:avLst>
+              <a:gd name="adj" fmla="val 3642"/>
+            </a:avLst>
+          </a:prstGeom>
+          <a:solidFill>
+            <a:srgbClr val="FFFFFF"/>
+          </a:solidFill>
+          <a:ln w="9525">
+            <a:solidFill>
+              <a:srgbClr val="E5E5E5"/>
+            </a:solidFill>
+            <a:prstDash val="solid"/>
+          </a:ln>
+          <a:effectLst>
+            <a:outerShdw sx="100000" sy="100000" kx="0" ky="0" algn="bl" rotWithShape="0" blurRad="76200" dist="19050" dir="5400000">
+              <a:srgbClr val="1D2D3E">
+                <a:alpha val="10000"/>
+              </a:srgbClr>
+            </a:outerShdw>
+          </a:effectLst>
+        </p:spPr>
+      </p:sp>
+      <p:sp>
+        <p:nvSpPr>
+          <p:cNvPr id="10" name="Shape 8"/>
+          <p:cNvSpPr/>
+          <p:nvPr/>
+        </p:nvSpPr>
+        <p:spPr>
+          <a:xfrm>
+            <a:off x="4594250" y="1947672"/>
+            <a:ext cx="777240" cy="777240"/>
+          </a:xfrm>
+          <a:prstGeom prst="roundRect">
+            <a:avLst>
+              <a:gd name="adj" fmla="val 22000"/>
+            </a:avLst>
+          </a:prstGeom>
+          <a:solidFill>
+            <a:srgbClr val="EBF8FF"/>
+          </a:solidFill>
+          <a:ln/>
+        </p:spPr>
+      </p:sp>
+      <p:sp>
+        <p:nvSpPr>
+          <p:cNvPr id="11" name="Shape 9"/>
+          <p:cNvSpPr/>
+          <p:nvPr/>
+        </p:nvSpPr>
+        <p:spPr>
+          <a:xfrm>
+            <a:off x="7048805" y="1965960"/>
+            <a:ext cx="548640" cy="292608"/>
+          </a:xfrm>
+          <a:prstGeom prst="roundRect">
+            <a:avLst>
+              <a:gd name="adj" fmla="val 50000"/>
+            </a:avLst>
+          </a:prstGeom>
+          <a:solidFill>
+            <a:srgbClr val="EBF8FF"/>
+          </a:solidFill>
+          <a:ln/>
+        </p:spPr>
+      </p:sp>
+      <p:sp>
+        <p:nvSpPr>
+          <p:cNvPr id="12" name="Text 10"/>
+          <p:cNvSpPr txBox="1"/>
+          <p:nvPr/>
+        </p:nvSpPr>
+        <p:spPr>
+          <a:xfrm>
+            <a:off x="7048805" y="1965960"/>
+            <a:ext cx="548640" cy="292608"/>
+          </a:xfrm>
+          <a:prstGeom prst="rect">
+            <a:avLst/>
+          </a:prstGeom>
+          <a:noFill/>
+          <a:ln/>
+        </p:spPr>
+        <p:txBody>
+          <a:bodyPr wrap="square" lIns="0" tIns="0" rIns="0" bIns="0" rtlCol="0" anchor="ctr"/>
+          <a:lstStyle/>
+          <a:p>
+            <a:pPr algn="ctr" indent="0" marL="0">
+              <a:buNone/>
+            </a:pPr>
+            <a:r>
+              <a:rPr lang="en-US" sz="1100" b="1" dirty="0">
+                <a:solidFill>
+                  <a:srgbClr val="0064D9"/>
+                </a:solidFill>
+              </a:rPr>
+              <a:t>2</a:t>
+            </a:r>
+            <a:endParaRPr lang="en-US" sz="1100" dirty="0"/>
+          </a:p>
+        </p:txBody>
+      </p:sp>
+      <p:sp>
+        <p:nvSpPr>
+          <p:cNvPr id="13" name="Text 11"/>
+          <p:cNvSpPr txBox="1"/>
+          <p:nvPr/>
+        </p:nvSpPr>
+        <p:spPr>
+          <a:xfrm>
+            <a:off x="4594250" y="2889504"/>
+            <a:ext cx="3003194" cy="2962656"/>
+          </a:xfrm>
+          <a:prstGeom prst="rect">
+            <a:avLst/>
+          </a:prstGeom>
+          <a:noFill/>
+          <a:ln/>
+        </p:spPr>
+        <p:txBody>
+          <a:bodyPr wrap="square" lIns="0" tIns="0" rIns="0" bIns="0" rtlCol="0" anchor="t"/>
+          <a:lstStyle/>
+          <a:p>
+            <a:pPr indent="0" marL="0">
+              <a:spcAft>
+                <a:spcPts val="600"/>
+              </a:spcAft>
+              <a:buNone/>
+            </a:pPr>
+            <a:r>
+              <a:rPr lang="en-US" sz="1900" b="1" dirty="0">
+                <a:solidFill>
+                  <a:srgbClr val="1D2D3E"/>
+                </a:solidFill>
+              </a:rPr>
+              <a:t>Priorize Extensões “In-App”</a:t>
+            </a:r>
+            <a:endParaRPr lang="en-US" sz="1600" dirty="0"/>
+          </a:p>
+          <a:p>
+            <a:pPr indent="0" marL="0">
+              <a:spcAft>
+                <a:spcPts val="400"/>
+              </a:spcAft>
+              <a:buNone/>
+            </a:pPr>
+            <a:r>
+              <a:rPr lang="en-US" sz="1500" dirty="0">
+                <a:solidFill>
+                  <a:srgbClr val="556B82"/>
+                </a:solidFill>
+              </a:rPr>
+              <a:t>Antes de escrever código, verifique se a necessidade pode ser atendida com </a:t>
+            </a:r>
+            <a:r>
+              <a:rPr lang="en-US" sz="1500" b="1" dirty="0">
+                <a:solidFill>
+                  <a:srgbClr val="556B82"/>
+                </a:solidFill>
+              </a:rPr>
+              <a:t>Key User Extensibility</a:t>
+            </a:r>
+            <a:r>
+              <a:rPr lang="en-US" sz="1500" dirty="0">
+                <a:solidFill>
+                  <a:srgbClr val="556B82"/>
+                </a:solidFill>
+              </a:rPr>
+              <a:t> ou </a:t>
+            </a:r>
+            <a:r>
+              <a:rPr lang="en-US" sz="1500" b="1" dirty="0">
+                <a:solidFill>
+                  <a:srgbClr val="556B82"/>
+                </a:solidFill>
+              </a:rPr>
+              <a:t>Cloud BAdIs</a:t>
+            </a:r>
+            <a:r>
+              <a:rPr lang="en-US" sz="1500" dirty="0">
+                <a:solidFill>
+                  <a:srgbClr val="556B82"/>
+                </a:solidFill>
+              </a:rPr>
+              <a:t>. Evite as User Exits antigas sempre que possível.</a:t>
+            </a:r>
+            <a:endParaRPr lang="en-US" sz="1600" dirty="0"/>
+          </a:p>
+        </p:txBody>
+      </p:sp>
+      <p:sp>
+        <p:nvSpPr>
+          <p:cNvPr id="14" name="Shape 12"/>
+          <p:cNvSpPr/>
+          <p:nvPr/>
+        </p:nvSpPr>
+        <p:spPr>
+          <a:xfrm>
+            <a:off x="8127797" y="1691640"/>
+            <a:ext cx="3515258" cy="4343400"/>
+          </a:xfrm>
+          <a:prstGeom prst="roundRect">
+            <a:avLst>
+              <a:gd name="adj" fmla="val 3642"/>
+            </a:avLst>
+          </a:prstGeom>
+          <a:solidFill>
+            <a:srgbClr val="FFFFFF"/>
+          </a:solidFill>
+          <a:ln w="9525">
+            <a:solidFill>
+              <a:srgbClr val="E5E5E5"/>
+            </a:solidFill>
+            <a:prstDash val="solid"/>
+          </a:ln>
+          <a:effectLst>
+            <a:outerShdw sx="100000" sy="100000" kx="0" ky="0" algn="bl" rotWithShape="0" blurRad="76200" dist="19050" dir="5400000">
+              <a:srgbClr val="1D2D3E">
+                <a:alpha val="10000"/>
+              </a:srgbClr>
+            </a:outerShdw>
+          </a:effectLst>
+        </p:spPr>
+      </p:sp>
+      <p:sp>
+        <p:nvSpPr>
+          <p:cNvPr id="15" name="Shape 13"/>
+          <p:cNvSpPr/>
+          <p:nvPr/>
+        </p:nvSpPr>
+        <p:spPr>
+          <a:xfrm>
+            <a:off x="8383829" y="1947672"/>
+            <a:ext cx="777240" cy="777240"/>
+          </a:xfrm>
+          <a:prstGeom prst="roundRect">
+            <a:avLst>
+              <a:gd name="adj" fmla="val 22000"/>
+            </a:avLst>
+          </a:prstGeom>
+          <a:solidFill>
+            <a:srgbClr val="EBF8FF"/>
+          </a:solidFill>
+          <a:ln/>
+        </p:spPr>
+      </p:sp>
+      <p:sp>
+        <p:nvSpPr>
+          <p:cNvPr id="16" name="Shape 14"/>
+          <p:cNvSpPr/>
+          <p:nvPr/>
+        </p:nvSpPr>
+        <p:spPr>
+          <a:xfrm>
+            <a:off x="10838383" y="1965960"/>
+            <a:ext cx="548640" cy="292608"/>
+          </a:xfrm>
+          <a:prstGeom prst="roundRect">
+            <a:avLst>
+              <a:gd name="adj" fmla="val 50000"/>
+            </a:avLst>
+          </a:prstGeom>
+          <a:solidFill>
+            <a:srgbClr val="EBF8FF"/>
+          </a:solidFill>
+          <a:ln/>
+        </p:spPr>
+      </p:sp>
+      <p:sp>
+        <p:nvSpPr>
+          <p:cNvPr id="17" name="Text 15"/>
+          <p:cNvSpPr txBox="1"/>
+          <p:nvPr/>
+        </p:nvSpPr>
+        <p:spPr>
+          <a:xfrm>
+            <a:off x="10838383" y="1965960"/>
+            <a:ext cx="548640" cy="292608"/>
+          </a:xfrm>
+          <a:prstGeom prst="rect">
+            <a:avLst/>
+          </a:prstGeom>
+          <a:noFill/>
+          <a:ln/>
+        </p:spPr>
+        <p:txBody>
+          <a:bodyPr wrap="square" lIns="0" tIns="0" rIns="0" bIns="0" rtlCol="0" anchor="ctr"/>
+          <a:lstStyle/>
+          <a:p>
+            <a:pPr algn="ctr" indent="0" marL="0">
+              <a:buNone/>
+            </a:pPr>
+            <a:r>
+              <a:rPr lang="en-US" sz="1100" b="1" dirty="0">
+                <a:solidFill>
+                  <a:srgbClr val="0064D9"/>
+                </a:solidFill>
+              </a:rPr>
+              <a:t>3</a:t>
+            </a:r>
+            <a:endParaRPr lang="en-US" sz="1100" dirty="0"/>
+          </a:p>
+        </p:txBody>
+      </p:sp>
+      <p:sp>
+        <p:nvSpPr>
+          <p:cNvPr id="18" name="Text 16"/>
+          <p:cNvSpPr txBox="1"/>
+          <p:nvPr/>
+        </p:nvSpPr>
+        <p:spPr>
+          <a:xfrm>
+            <a:off x="8383829" y="2889504"/>
+            <a:ext cx="3003194" cy="2962656"/>
+          </a:xfrm>
+          <a:prstGeom prst="rect">
+            <a:avLst/>
+          </a:prstGeom>
+          <a:noFill/>
+          <a:ln/>
+        </p:spPr>
+        <p:txBody>
+          <a:bodyPr wrap="square" lIns="0" tIns="0" rIns="0" bIns="0" rtlCol="0" anchor="t"/>
+          <a:lstStyle/>
+          <a:p>
+            <a:pPr indent="0" marL="0">
+              <a:spcAft>
+                <a:spcPts val="600"/>
+              </a:spcAft>
+              <a:buNone/>
+            </a:pPr>
+            <a:r>
+              <a:rPr lang="en-US" sz="1900" b="1" dirty="0">
+                <a:solidFill>
+                  <a:srgbClr val="1D2D3E"/>
+                </a:solidFill>
+              </a:rPr>
+              <a:t>Envelopar, Não Replicar o Legado</a:t>
+            </a:r>
+            <a:endParaRPr lang="en-US" sz="1600" dirty="0"/>
+          </a:p>
+          <a:p>
+            <a:pPr indent="0" marL="0">
+              <a:spcAft>
+                <a:spcPts val="400"/>
+              </a:spcAft>
+              <a:buNone/>
+            </a:pPr>
+            <a:r>
+              <a:rPr lang="en-US" sz="1500" dirty="0">
+                <a:solidFill>
+                  <a:srgbClr val="556B82"/>
+                </a:solidFill>
+              </a:rPr>
+              <a:t>Quando uma lógica de negócio antiga e crítica precisar ser usada em um novo desenvolvimento, </a:t>
+            </a:r>
+            <a:r>
+              <a:rPr lang="en-US" sz="1500" b="1" dirty="0">
+                <a:solidFill>
+                  <a:srgbClr val="556B82"/>
+                </a:solidFill>
+              </a:rPr>
+              <a:t>encapsule-a em um Wrapper</a:t>
+            </a:r>
+            <a:r>
+              <a:rPr lang="en-US" sz="1500" dirty="0">
+                <a:solidFill>
+                  <a:srgbClr val="556B82"/>
+                </a:solidFill>
+              </a:rPr>
+              <a:t>. Não reescreva nem duplique a lógica.</a:t>
+            </a:r>
+            <a:endParaRPr lang="en-US" sz="1600" dirty="0"/>
+          </a:p>
+        </p:txBody>
+      </p:sp>
+      <p:pic>
+        <p:nvPicPr>
+          <p:cNvPr id="19" name="Image 0" descr="preencoded.png">    </p:cNvPr>
+          <p:cNvPicPr>
+            <a:picLocks noChangeAspect="1"/>
+          </p:cNvPicPr>
+          <p:nvPr/>
+        </p:nvPicPr>
+        <p:blipFill>
+          <a:blip r:embed="rId1"/>
+          <a:stretch>
+            <a:fillRect/>
+          </a:stretch>
+        </p:blipFill>
+        <p:spPr>
+          <a:xfrm>
+            <a:off x="991210" y="2134210"/>
+            <a:ext cx="404165" cy="404165"/>
+          </a:xfrm>
+          <a:prstGeom prst="rect">
+            <a:avLst/>
+          </a:prstGeom>
+        </p:spPr>
+      </p:pic>
+      <p:pic>
+        <p:nvPicPr>
+          <p:cNvPr id="20" name="Image 1" descr="preencoded.png">    </p:cNvPr>
+          <p:cNvPicPr>
+            <a:picLocks noChangeAspect="1"/>
+          </p:cNvPicPr>
+          <p:nvPr/>
+        </p:nvPicPr>
+        <p:blipFill>
+          <a:blip r:embed="rId2"/>
+          <a:stretch>
+            <a:fillRect/>
+          </a:stretch>
+        </p:blipFill>
+        <p:spPr>
+          <a:xfrm>
+            <a:off x="4780788" y="2134210"/>
+            <a:ext cx="404165" cy="404165"/>
+          </a:xfrm>
+          <a:prstGeom prst="rect">
+            <a:avLst/>
+          </a:prstGeom>
+        </p:spPr>
+      </p:pic>
+      <p:pic>
+        <p:nvPicPr>
+          <p:cNvPr id="21" name="Image 2" descr="preencoded.png">    </p:cNvPr>
+          <p:cNvPicPr>
+            <a:picLocks noChangeAspect="1"/>
+          </p:cNvPicPr>
+          <p:nvPr/>
+        </p:nvPicPr>
+        <p:blipFill>
+          <a:blip r:embed="rId3"/>
+          <a:stretch>
+            <a:fillRect/>
+          </a:stretch>
+        </p:blipFill>
+        <p:spPr>
+          <a:xfrm>
+            <a:off x="8570366" y="2134210"/>
+            <a:ext cx="404165" cy="404165"/>
+          </a:xfrm>
+          <a:prstGeom prst="rect">
+            <a:avLst/>
+          </a:prstGeom>
+        </p:spPr>
+      </p:pic>
+      <p:sp>
+        <p:nvSpPr>
+          <p:cNvPr id="25" name="Slide Number Placeholder 0"/>
+          <p:cNvSpPr>
+            <a:spLocks noGrp="1"/>
+          </p:cNvSpPr>
+          <p:nvPr>
+            <p:ph type="sldNum" sz="quarter" idx="4294967295"/>
+          </p:nvPr>
+        </p:nvSpPr>
+        <p:spPr>
+          <a:xfrm>
+            <a:off x="11094415" y="6400800"/>
+            <a:ext cx="548640" cy="274320"/>
+          </a:xfrm>
+          <a:prstGeom prst="rect">
+            <a:avLst/>
+          </a:prstGeom>
+          <a:extLst>
+            <a:ext uri="{C572A759-6A51-4108-AA02-DFA0A04FC94B}">
+              <ma14:wrappingTextBoxFlag xmlns:ma14="http://schemas.microsoft.com/office/mac/drawingml/2011/main" val="0"/>
+            </a:ext>
+          </a:extLst>
+        </p:spPr>
+        <p:txBody>
+          <a:bodyPr lIns="0" tIns="0" rIns="0" bIns="0"/>
+          <a:lstStyle>
+            <a:lvl1pPr>
+              <a:defRPr sz="1000">
+                <a:solidFill>
+                  <a:srgbClr val="556B82"/>
+                </a:solidFill>
+              </a:defRPr>
+            </a:lvl1pPr>
+          </a:lstStyle>
+          <a:p>
+            <a:pPr algn="r"/>
+            <a:fld id="{F7021451-1387-4CA6-816F-3879F97B5CBC}" type="slidenum">
+              <a:rPr b="0" lang="en-US"/>
+              <a:t>13</a:t>
+            </a:fld>
+            <a:endParaRPr lang="en-US"/>
+          </a:p>
+        </p:txBody>
+      </p:sp>
+    </p:spTree>
+  </p:cSld>
+  <p:clrMapOvr>
+    <a:masterClrMapping/>
+  </p:clrMapOvr>
+</p:sld>
+</file>
+
+<file path=ppt/slides/slide14.xml><?xml version="1.0" encoding="utf-8"?>
+<p:sld xmlns:a="http://schemas.openxmlformats.org/drawingml/2006/main" xmlns:r="http://schemas.openxmlformats.org/officeDocument/2006/relationships" xmlns:p="http://schemas.openxmlformats.org/presentationml/2006/main">
+  <p:cSld name="Slide 14">
+    <p:spTree>
+      <p:nvGrpSpPr>
+        <p:cNvPr id="1" name=""/>
+        <p:cNvGrpSpPr/>
+        <p:nvPr/>
+      </p:nvGrpSpPr>
+      <p:grpSpPr>
+        <a:xfrm>
+          <a:off x="0" y="0"/>
+          <a:ext cx="0" cy="0"/>
+          <a:chOff x="0" y="0"/>
+          <a:chExt cx="0" cy="0"/>
+        </a:xfrm>
+      </p:grpSpPr>
+      <p:sp>
+        <p:nvSpPr>
+          <p:cNvPr id="2" name="Text 0"/>
+          <p:cNvSpPr/>
+          <p:nvPr>
+            <p:ph idx="101" type="title" hasCustomPrompt="1"/>
+          </p:nvPr>
+        </p:nvSpPr>
+        <p:spPr>
+          <a:xfrm>
+            <a:off x="548640" y="713232"/>
+            <a:ext cx="11094415" cy="685800"/>
+          </a:xfrm>
+          <a:prstGeom prst="rect">
+            <a:avLst/>
+          </a:prstGeom>
+          <a:noFill/>
+          <a:ln/>
+        </p:spPr>
+        <p:txBody>
+          <a:bodyPr wrap="square" lIns="0" tIns="0" rIns="0" bIns="0" rtlCol="0" anchor="t"/>
+          <a:lstStyle/>
+          <a:p>
+            <a:pPr algn="l" indent="0" marL="0">
+              <a:buNone/>
+            </a:pPr>
+            <a:r>
+              <a:rPr lang="en-US" sz="3000" b="1" dirty="0">
+                <a:solidFill>
+                  <a:srgbClr val="1D2D3E"/>
+                </a:solidFill>
+              </a:rPr>
               <a:t>Glossário Essencial para Navegar os Dois Mundos</a:t>
             </a:r>
             <a:endParaRPr lang="en-US" sz="3000" dirty="0"/>
@@ -5709,7 +7039,7 @@
       </p:sp>
       <p:graphicFrame>
         <p:nvGraphicFramePr>
-          <p:cNvPr id="14" name="Table 0"/>
+          <p:cNvPr id="15" name="Table 0"/>
           <p:cNvGraphicFramePr>
             <a:graphicFrameLocks noGrp="1"/>
           </p:cNvGraphicFramePr>
@@ -5733,7 +7063,7 @@
                 <a:gridCol w="3017520"/>
                 <a:gridCol w="8074152"/>
               </a:tblGrid>
-              <a:tr h="713232">
+              <a:tr h="621792">
                 <a:tc>
                   <a:txBody>
                     <a:bodyPr/>
@@ -5743,7 +7073,7 @@
                         <a:buNone/>
                       </a:pPr>
                       <a:r>
-                        <a:rPr lang="en-US" sz="1400" b="1" dirty="0">
+                        <a:rPr lang="en-US" sz="1300" b="1" dirty="0">
                           <a:solidFill>
                             <a:srgbClr val="556B82"/>
                           </a:solidFill>
@@ -5792,7 +7122,7 @@
                         <a:buNone/>
                       </a:pPr>
                       <a:r>
-                        <a:rPr lang="en-US" sz="1400" b="1" dirty="0">
+                        <a:rPr lang="en-US" sz="1300" b="1" dirty="0">
                           <a:solidFill>
                             <a:srgbClr val="556B82"/>
                           </a:solidFill>
@@ -5833,7 +7163,7 @@
                   </a:tcPr>
                 </a:tc>
               </a:tr>
-              <a:tr h="713232">
+              <a:tr h="621792">
                 <a:tc>
                   <a:txBody>
                     <a:bodyPr/>
@@ -5843,7 +7173,7 @@
                         <a:buNone/>
                       </a:pPr>
                       <a:r>
-                        <a:rPr lang="en-US" sz="1500" b="1" dirty="0">
+                        <a:rPr lang="en-US" sz="1400" b="1" dirty="0">
                           <a:solidFill>
                             <a:srgbClr val="1D2D3E"/>
                           </a:solidFill>
@@ -5892,7 +7222,7 @@
                         <a:buNone/>
                       </a:pPr>
                       <a:r>
-                        <a:rPr lang="en-US" sz="1500" dirty="0">
+                        <a:rPr lang="en-US" sz="1400" dirty="0">
                           <a:solidFill>
                             <a:srgbClr val="1D2D3E"/>
                           </a:solidFill>
@@ -5933,7 +7263,7 @@
                   </a:tcPr>
                 </a:tc>
               </a:tr>
-              <a:tr h="713232">
+              <a:tr h="621792">
                 <a:tc>
                   <a:txBody>
                     <a:bodyPr/>
@@ -5943,7 +7273,7 @@
                         <a:buNone/>
                       </a:pPr>
                       <a:r>
-                        <a:rPr lang="en-US" sz="1500" b="1" dirty="0">
+                        <a:rPr lang="en-US" sz="1400" b="1" dirty="0">
                           <a:solidFill>
                             <a:srgbClr val="1D2D3E"/>
                           </a:solidFill>
@@ -5992,7 +7322,7 @@
                         <a:buNone/>
                       </a:pPr>
                       <a:r>
-                        <a:rPr lang="en-US" sz="1500" dirty="0">
+                        <a:rPr lang="en-US" sz="1400" dirty="0">
                           <a:solidFill>
                             <a:srgbClr val="1D2D3E"/>
                           </a:solidFill>
@@ -6033,7 +7363,7 @@
                   </a:tcPr>
                 </a:tc>
               </a:tr>
-              <a:tr h="713232">
+              <a:tr h="621792">
                 <a:tc>
                   <a:txBody>
                     <a:bodyPr/>
@@ -6043,7 +7373,7 @@
                         <a:buNone/>
                       </a:pPr>
                       <a:r>
-                        <a:rPr lang="en-US" sz="1500" b="1" dirty="0">
+                        <a:rPr lang="en-US" sz="1400" b="1" dirty="0">
                           <a:solidFill>
                             <a:srgbClr val="1D2D3E"/>
                           </a:solidFill>
@@ -6092,12 +7422,12 @@
                         <a:buNone/>
                       </a:pPr>
                       <a:r>
-                        <a:rPr lang="en-US" sz="1500" dirty="0">
+                        <a:rPr lang="en-US" sz="1400" dirty="0">
                           <a:solidFill>
                             <a:srgbClr val="1D2D3E"/>
                           </a:solidFill>
                         </a:rPr>
-                        <a:t>Classe no Tier 3 que encapsula lógica legada e expõe uma interface simplificada e liberada (contrato C1) para consumo por aplicações do Tier 2.</a:t>
+                        <a:t>Classe do Tier 2 (Cloud API Enablement), escrita em ABAP clássico, que encapsula lógica legada e expõe uma interface simplificada e liberada (contrato C1) para consumo por aplicações do Tier 1.</a:t>
                       </a:r>
                       <a:endParaRPr lang="en-US" sz="1200" dirty="0"/>
                     </a:p>
@@ -6133,7 +7463,7 @@
                   </a:tcPr>
                 </a:tc>
               </a:tr>
-              <a:tr h="713232">
+              <a:tr h="621792">
                 <a:tc>
                   <a:txBody>
                     <a:bodyPr/>
@@ -6143,7 +7473,7 @@
                         <a:buNone/>
                       </a:pPr>
                       <a:r>
-                        <a:rPr lang="en-US" sz="1500" b="1" dirty="0">
+                        <a:rPr lang="en-US" sz="1400" b="1" dirty="0">
                           <a:solidFill>
                             <a:srgbClr val="1D2D3E"/>
                           </a:solidFill>
@@ -6192,7 +7522,7 @@
                         <a:buNone/>
                       </a:pPr>
                       <a:r>
-                        <a:rPr lang="en-US" sz="1500" dirty="0">
+                        <a:rPr lang="en-US" sz="1400" dirty="0">
                           <a:solidFill>
                             <a:srgbClr val="1D2D3E"/>
                           </a:solidFill>
@@ -6233,7 +7563,7 @@
                   </a:tcPr>
                 </a:tc>
               </a:tr>
-              <a:tr h="713232">
+              <a:tr h="621792">
                 <a:tc>
                   <a:txBody>
                     <a:bodyPr/>
@@ -6243,7 +7573,107 @@
                         <a:buNone/>
                       </a:pPr>
                       <a:r>
-                        <a:rPr lang="en-US" sz="1500" b="1" dirty="0">
+                        <a:rPr lang="en-US" sz="1400" b="1" dirty="0">
+                          <a:solidFill>
+                            <a:srgbClr val="1D2D3E"/>
+                          </a:solidFill>
+                        </a:rPr>
+                        <a:t>Níveis A–D do Clean Core</a:t>
+                      </a:r>
+                      <a:endParaRPr lang="en-US" sz="1200" dirty="0"/>
+                    </a:p>
+                  </a:txBody>
+                  <a:tcPr marL="101600" marR="101600" marT="50800" marB="50800" anchor="ctr">
+                    <a:lnL w="0" cap="flat" cmpd="sng" algn="ctr">
+                      <a:noFill/>
+                    </a:lnL>
+                    <a:lnR w="0" cap="flat" cmpd="sng" algn="ctr">
+                      <a:noFill/>
+                    </a:lnR>
+                    <a:lnT w="9525" cap="flat" cmpd="sng" algn="ctr">
+                      <a:solidFill>
+                        <a:srgbClr val="E5E5E5"/>
+                      </a:solidFill>
+                      <a:prstDash val="solid"/>
+                      <a:round/>
+                      <a:headEnd type="none" w="med" len="med"/>
+                      <a:tailEnd type="none" w="med" len="med"/>
+                    </a:lnT>
+                    <a:lnB w="9525" cap="flat" cmpd="sng" algn="ctr">
+                      <a:solidFill>
+                        <a:srgbClr val="E5E5E5"/>
+                      </a:solidFill>
+                      <a:prstDash val="solid"/>
+                      <a:round/>
+                      <a:headEnd type="none" w="med" len="med"/>
+                      <a:tailEnd type="none" w="med" len="med"/>
+                    </a:lnB>
+                    <a:solidFill>
+                      <a:srgbClr val="FFFFFF"/>
+                    </a:solidFill>
+                  </a:tcPr>
+                </a:tc>
+                <a:tc>
+                  <a:txBody>
+                    <a:bodyPr/>
+                    <a:lstStyle/>
+                    <a:p>
+                      <a:pPr algn="l" indent="0" marL="0">
+                        <a:buNone/>
+                      </a:pPr>
+                      <a:r>
+                        <a:rPr lang="en-US" sz="1400" dirty="0">
+                          <a:solidFill>
+                            <a:srgbClr val="1D2D3E"/>
+                          </a:solidFill>
+                        </a:rPr>
+                        <a:t>Classificação de 2025 que sucede os 3 Tiers: A = APIs liberadas, B = APIs clássicas, C = objetos internos, D = não recomendado.</a:t>
+                      </a:r>
+                      <a:endParaRPr lang="en-US" sz="1200" dirty="0"/>
+                    </a:p>
+                  </a:txBody>
+                  <a:tcPr marL="101600" marR="101600" marT="50800" marB="50800" anchor="ctr">
+                    <a:lnL w="0" cap="flat" cmpd="sng" algn="ctr">
+                      <a:noFill/>
+                    </a:lnL>
+                    <a:lnR w="0" cap="flat" cmpd="sng" algn="ctr">
+                      <a:noFill/>
+                    </a:lnR>
+                    <a:lnT w="9525" cap="flat" cmpd="sng" algn="ctr">
+                      <a:solidFill>
+                        <a:srgbClr val="E5E5E5"/>
+                      </a:solidFill>
+                      <a:prstDash val="solid"/>
+                      <a:round/>
+                      <a:headEnd type="none" w="med" len="med"/>
+                      <a:tailEnd type="none" w="med" len="med"/>
+                    </a:lnT>
+                    <a:lnB w="9525" cap="flat" cmpd="sng" algn="ctr">
+                      <a:solidFill>
+                        <a:srgbClr val="E5E5E5"/>
+                      </a:solidFill>
+                      <a:prstDash val="solid"/>
+                      <a:round/>
+                      <a:headEnd type="none" w="med" len="med"/>
+                      <a:tailEnd type="none" w="med" len="med"/>
+                    </a:lnB>
+                    <a:solidFill>
+                      <a:srgbClr val="FFFFFF"/>
+                    </a:solidFill>
+                  </a:tcPr>
+                </a:tc>
+              </a:tr>
+              <a:tr h="621792">
+                <a:tc>
+                  <a:txBody>
+                    <a:bodyPr/>
+                    <a:lstStyle/>
+                    <a:p>
+                      <a:pPr algn="l" indent="0" marL="0">
+                        <a:buNone/>
+                      </a:pPr>
+                      <a:r>
+                        <a:rPr lang="en-US" sz="1400" b="1" dirty="0">
                           <a:solidFill>
                             <a:srgbClr val="1D2D3E"/>
                           </a:solidFill>
@@ -6292,12 +7722,12 @@
                         <a:buNone/>
                       </a:pPr>
                       <a:r>
-                        <a:rPr lang="en-US" sz="1500" dirty="0">
+                        <a:rPr lang="en-US" sz="1400" dirty="0">
                           <a:solidFill>
                             <a:srgbClr val="1D2D3E"/>
                           </a:solidFill>
                         </a:rPr>
-                        <a:t>Camada de extensibilidade irrestrita do Private Edition/On-Premise. Deve ser usada para manter o legado e construir Wrappers, não para novos projetos.</a:t>
+                        <a:t>Camada de extensibilidade irrestrita do Private Edition/On-Premise. Deve ser usada para manter o legado, não para novos projetos.</a:t>
                       </a:r>
                       <a:endParaRPr lang="en-US" sz="1200" dirty="0"/>
                     </a:p>
@@ -6406,7 +7836,7 @@
             <a:pPr algn="r"/>
             <a:fld id="{F7021451-1387-4CA6-816F-3879F97B5CBC}" type="slidenum">
               <a:rPr b="0" lang="en-US"/>
-              <a:t>13</a:t>
+              <a:t>14</a:t>
             </a:fld>
             <a:endParaRPr lang="en-US"/>
           </a:p>
@@ -6420,9 +7850,9 @@
 </p:sld>
 </file>
 
-<file path=ppt/slides/slide14.xml><?xml version="1.0" encoding="utf-8"?>
+<file path=ppt/slides/slide15.xml><?xml version="1.0" encoding="utf-8"?>
 <p:sld xmlns:a="http://schemas.openxmlformats.org/drawingml/2006/main" xmlns:r="http://schemas.openxmlformats.org/officeDocument/2006/relationships" xmlns:p="http://schemas.openxmlformats.org/presentationml/2006/main">
-  <p:cSld name="Slide 14">
+  <p:cSld name="Slide 15">
     <p:spTree>
       <p:nvGrpSpPr>
         <p:cNvPr id="1" name=""/>
@@ -6505,7 +7935,7 @@
                   <a:srgbClr val="C9D3DE"/>
                 </a:solidFill>
               </a:rPr>
-              <a:t>No S/4HANA Private Cloud, a liberdade técnica é uma faca de dois gumes. Adotar a disciplina Clean Core não é uma restrição, mas uma habilitação. Cada Wrapper que você constrói, cada novo projeto que você inicia no Tier 2, é um passo que garante:</a:t>
+              <a:t>No S/4HANA Private Cloud, a liberdade técnica é uma faca de dois gumes. Adotar a disciplina Clean Core não é uma restrição, mas uma habilitação. Cada Wrapper que você constrói, cada novo projeto que você inicia no Tier 1, é um passo que garante:</a:t>
             </a:r>
             <a:endParaRPr lang="en-US" sz="1600" dirty="0"/>
           </a:p>
@@ -6876,7 +8306,7 @@
         </p:blipFill>
         <p:spPr>
           <a:xfrm>
-            <a:off x="868680" y="3108960"/>
+            <a:off x="4658258" y="3108960"/>
             <a:ext cx="548640" cy="548640"/>
           </a:xfrm>
           <a:prstGeom prst="rect">
@@ -6900,7 +8330,7 @@
         </p:blipFill>
         <p:spPr>
           <a:xfrm>
-            <a:off x="4658258" y="3108960"/>
+            <a:off x="868680" y="3108960"/>
             <a:ext cx="548640" cy="548640"/>
           </a:xfrm>
           <a:prstGeom prst="rect">
@@ -7001,7 +8431,7 @@
             <a:pPr algn="r"/>
             <a:fld id="{F7021451-1387-4CA6-816F-3879F97B5CBC}" type="slidenum">
               <a:rPr b="0" lang="en-US"/>
-              <a:t>14</a:t>
+              <a:t>15</a:t>
             </a:fld>
             <a:endParaRPr lang="en-US"/>
           </a:p>
@@ -7903,7 +9333,7 @@
                   <a:srgbClr val="FFFFFF"/>
                 </a:solidFill>
               </a:rPr>
-              <a:t>Tier 2 · On-Stack Developer Extensibility</a:t>
+              <a:t>Tier 1 · ABAP Cloud (Developer Extensibility)</a:t>
             </a:r>
             <a:endParaRPr lang="en-US" sz="2200" dirty="0"/>
           </a:p>
@@ -8668,7 +10098,7 @@
                   <a:srgbClr val="1D2D3E"/>
                 </a:solidFill>
               </a:rPr>
-              <a:t>. Todos os novos desenvolvimentos devem nascer no Tier 2 ou no Tier 1 (Key User).</a:t>
+              <a:t>. Todos os novos desenvolvimentos devem nascer no Tier 1 (ABAP Cloud) ou via Key User Extensibility.</a:t>
             </a:r>
             <a:endParaRPr lang="en-US" sz="1600" dirty="0"/>
           </a:p>
@@ -9204,7 +10634,7 @@
                   <a:srgbClr val="FFFFFF"/>
                 </a:solidFill>
               </a:rPr>
-              <a:t>Novas Funcionalidades (Tier 2)</a:t>
+              <a:t>Novas Funcionalidades (Tier 1)</a:t>
             </a:r>
             <a:endParaRPr lang="en-US" sz="1500" dirty="0"/>
           </a:p>
@@ -9432,7 +10862,7 @@
                   <a:srgbClr val="556B82"/>
                 </a:solidFill>
               </a:rPr>
-              <a:t>Qualquer novo requisito (um app Fiori, uma API) deve ser construído com as regras do Tier 2 (ABAP Cloud, RAP). Esta é a sua agilidade.</a:t>
+              <a:t>Qualquer novo requisito (um app Fiori, uma API) deve ser construído com as regras do Tier 1 (ABAP Cloud, RAP). Esta é a sua agilidade.</a:t>
             </a:r>
             <a:endParaRPr lang="en-US" sz="1400" dirty="0"/>
           </a:p>
@@ -9509,7 +10939,7 @@
                   <a:srgbClr val="1D2D3E"/>
                 </a:solidFill>
               </a:rPr>
-              <a:t>Como fazer o “novo” (Tier 2) conversar de forma segura com o “velho” (Tier 3) quando for absolutamente necessário?</a:t>
+              <a:t>Como fazer o “novo” (Tier 1) conversar de forma segura com o “velho” (Tier 3) quando for absolutamente necessário?</a:t>
             </a:r>
             <a:endParaRPr lang="en-US" sz="1400" dirty="0"/>
           </a:p>
@@ -10581,7 +12011,7 @@
                   <a:srgbClr val="556B82"/>
                 </a:solidFill>
               </a:rPr>
-              <a:t>Tier 2 contaminado</a:t>
+              <a:t>Tier 1 contaminado</a:t>
             </a:r>
             <a:endParaRPr lang="en-US" sz="1100" dirty="0"/>
           </a:p>
@@ -10827,7 +12257,7 @@
                   <a:srgbClr val="1D2D3E"/>
                 </a:solidFill>
               </a:rPr>
-              <a:t> o código no Tier 2 é um investimento. Ele usa apenas APIs estáveis, blindando seu desenvolvimento contra mudanças no núcleo SAP.</a:t>
+              <a:t> o código no Tier 1 é um investimento. Ele usa apenas APIs estáveis, blindando seu desenvolvimento contra mudanças no núcleo SAP.</a:t>
             </a:r>
             <a:endParaRPr lang="en-US" sz="1600" dirty="0"/>
           </a:p>
@@ -10873,8 +12303,8 @@
         </p:blipFill>
         <p:spPr>
           <a:xfrm>
-            <a:off x="5897880" y="5426964"/>
-            <a:ext cx="347472" cy="347472"/>
+            <a:off x="5789981" y="3915461"/>
+            <a:ext cx="261518" cy="261518"/>
           </a:xfrm>
           <a:prstGeom prst="rect">
             <a:avLst/>
@@ -10897,8 +12327,8 @@
         </p:blipFill>
         <p:spPr>
           <a:xfrm>
-            <a:off x="5789981" y="3915461"/>
-            <a:ext cx="261518" cy="261518"/>
+            <a:off x="5897880" y="5426964"/>
+            <a:ext cx="347472" cy="347472"/>
           </a:xfrm>
           <a:prstGeom prst="rect">
             <a:avLst/>
@@ -11189,7 +12619,7 @@
                   <a:srgbClr val="D6EBFF"/>
                 </a:solidFill>
               </a:rPr>
-              <a:t>Tier 2 · novas funcionalidades</a:t>
+              <a:t>Tier 1 · novas funcionalidades</a:t>
             </a:r>
             <a:endParaRPr lang="en-US" sz="1700" dirty="0"/>
           </a:p>
@@ -11462,7 +12892,7 @@
                   <a:srgbClr val="1D2D3E"/>
                 </a:solidFill>
               </a:rPr>
-              <a:t>Quando o código moderno (Tier 2) precisa acessar uma lógica de negócio crítica que reside no legado (Tier 3), não cruzamos a fronteira de forma imprudente. Construímos uma ponte: </a:t>
+              <a:t>Quando o código moderno (Tier 1) precisa acessar uma lógica de negócio crítica que reside no legado (Tier 3), não cruzamos a fronteira de forma imprudente. Construímos uma ponte: </a:t>
             </a:r>
             <a:r>
               <a:rPr lang="en-US" sz="1500" b="1" dirty="0">
@@ -11741,7 +13171,7 @@
                   <a:srgbClr val="1D2D3E"/>
                 </a:solidFill>
               </a:rPr>
-              <a:t> você está criando um app Fiori (Tier 2) e precisa usar a função legada e complexa </a:t>
+              <a:t> você está criando um app Fiori (Tier 1) e precisa usar a função legada e complexa </a:t>
             </a:r>
             <a:r>
               <a:rPr lang="en-US" sz="1500" dirty="0">
@@ -11823,7 +13253,7 @@
                   <a:srgbClr val="1D2D3E"/>
                 </a:solidFill>
               </a:rPr>
-              <a:t>Passo 1: Criar o Wrapper no Mundo Clássico (Tier 3)</a:t>
+              <a:t>Passo 1: Criar o Wrapper (Tier 2) em ABAP Clássico</a:t>
             </a:r>
             <a:endParaRPr lang="en-US" sz="1500" dirty="0"/>
           </a:p>
@@ -12219,7 +13649,7 @@
                   <a:srgbClr val="B44F00"/>
                 </a:solidFill>
               </a:rPr>
-              <a:t>Este ato é a sua “garantia” ao compilador do Tier 2: “eu garanto que esta interface é estável e segura para consumo.”</a:t>
+              <a:t>Este ato é a sua “garantia” ao compilador do Tier 1: “eu garanto que esta interface é estável e segura para consumo.”</a:t>
             </a:r>
             <a:endParaRPr lang="en-US" sz="1200" dirty="0"/>
           </a:p>
@@ -12306,7 +13736,7 @@
                   <a:srgbClr val="1D2D3E"/>
                 </a:solidFill>
               </a:rPr>
-              <a:t>Passo 3: Consumir no Mundo Cloud (Tier 2)</a:t>
+              <a:t>Passo 3: Consumir no Mundo Cloud (Tier 1)</a:t>
             </a:r>
             <a:endParaRPr lang="en-US" sz="1500" dirty="0"/>
           </a:p>
